--- a/ClasesPPTX/W06A.pptx
+++ b/ClasesPPTX/W06A.pptx
@@ -1838,7 +1838,7 @@
           </a:pPr>
           <a:r>
             <a:rPr lang="es-CO" dirty="0"/>
-            <a:t>W03</a:t>
+            <a:t>W04</a:t>
           </a:r>
         </a:p>
       </dgm:t>
@@ -1931,7 +1931,7 @@
           </a:pPr>
           <a:r>
             <a:rPr lang="es-CO" dirty="0"/>
-            <a:t>W04</a:t>
+            <a:t>W05</a:t>
           </a:r>
         </a:p>
       </dgm:t>
@@ -2070,6 +2070,83 @@
         </a:p>
       </dgm:t>
     </dgm:pt>
+    <dgm:pt modelId="{577E2A15-6446-4395-82B0-C620FF41CF3E}">
+      <dgm:prSet/>
+      <dgm:spPr/>
+      <dgm:t>
+        <a:bodyPr/>
+        <a:lstStyle/>
+        <a:p>
+          <a:pPr>
+            <a:defRPr b="1"/>
+          </a:pPr>
+          <a:r>
+            <a:rPr lang="es-CO"/>
+            <a:t>W03</a:t>
+          </a:r>
+          <a:endParaRPr lang="es-CO" dirty="0"/>
+        </a:p>
+      </dgm:t>
+    </dgm:pt>
+    <dgm:pt modelId="{E38A0B13-ED66-46E2-A3BC-087379B5508A}" type="parTrans" cxnId="{56D5FF89-4927-43E8-861C-E84F6C2BB1D5}">
+      <dgm:prSet/>
+      <dgm:spPr/>
+      <dgm:t>
+        <a:bodyPr/>
+        <a:lstStyle/>
+        <a:p>
+          <a:endParaRPr lang="es-CO"/>
+        </a:p>
+      </dgm:t>
+    </dgm:pt>
+    <dgm:pt modelId="{D48C33DC-F667-4A06-A064-CC92496C94EA}" type="sibTrans" cxnId="{56D5FF89-4927-43E8-861C-E84F6C2BB1D5}">
+      <dgm:prSet/>
+      <dgm:spPr/>
+      <dgm:t>
+        <a:bodyPr/>
+        <a:lstStyle/>
+        <a:p>
+          <a:endParaRPr lang="es-CO"/>
+        </a:p>
+      </dgm:t>
+    </dgm:pt>
+    <dgm:pt modelId="{C8B2B04D-0778-4C93-AAC3-3963613D13A6}">
+      <dgm:prSet/>
+      <dgm:spPr/>
+      <dgm:t>
+        <a:bodyPr/>
+        <a:lstStyle/>
+        <a:p>
+          <a:r>
+            <a:rPr lang="es-CO"/>
+            <a:t>Bases de SQL</a:t>
+          </a:r>
+          <a:endParaRPr lang="es-CO" dirty="0"/>
+        </a:p>
+      </dgm:t>
+    </dgm:pt>
+    <dgm:pt modelId="{C9ED31B7-D10C-406B-9704-8F1DDF1B78E5}" type="parTrans" cxnId="{010CD335-6C9C-401C-AB91-6BE655640365}">
+      <dgm:prSet/>
+      <dgm:spPr/>
+      <dgm:t>
+        <a:bodyPr/>
+        <a:lstStyle/>
+        <a:p>
+          <a:endParaRPr lang="es-CO"/>
+        </a:p>
+      </dgm:t>
+    </dgm:pt>
+    <dgm:pt modelId="{989ADA22-204C-429C-9D04-88632C6861CE}" type="sibTrans" cxnId="{010CD335-6C9C-401C-AB91-6BE655640365}">
+      <dgm:prSet/>
+      <dgm:spPr/>
+      <dgm:t>
+        <a:bodyPr/>
+        <a:lstStyle/>
+        <a:p>
+          <a:endParaRPr lang="es-CO"/>
+        </a:p>
+      </dgm:t>
+    </dgm:pt>
     <dgm:pt modelId="{9AE89FB1-F474-491F-AB27-A0F134775DF5}" type="pres">
       <dgm:prSet presAssocID="{2430CC21-05DE-42C5-993E-E946140B4D86}" presName="root" presStyleCnt="0">
         <dgm:presLayoutVars>
@@ -2123,7 +2200,7 @@
       <dgm:spPr/>
     </dgm:pt>
     <dgm:pt modelId="{34DD218C-FBA4-4914-8E86-E286CBBF679B}" type="pres">
-      <dgm:prSet presAssocID="{CF314EE2-D6D7-4536-A6FD-41DF85B6060B}" presName="ConnectorPoint" presStyleLbl="lnNode1" presStyleIdx="0" presStyleCnt="5"/>
+      <dgm:prSet presAssocID="{CF314EE2-D6D7-4536-A6FD-41DF85B6060B}" presName="ConnectorPoint" presStyleLbl="lnNode1" presStyleIdx="0" presStyleCnt="6"/>
       <dgm:spPr>
         <a:solidFill>
           <a:schemeClr val="accent1">
@@ -2153,11 +2230,11 @@
       <dgm:spPr/>
     </dgm:pt>
     <dgm:pt modelId="{90BFAD0B-06DA-4B4F-B83D-5C02B8A89EC4}" type="pres">
-      <dgm:prSet presAssocID="{CF314EE2-D6D7-4536-A6FD-41DF85B6060B}" presName="DropPin" presStyleLbl="alignNode1" presStyleIdx="0" presStyleCnt="10"/>
+      <dgm:prSet presAssocID="{CF314EE2-D6D7-4536-A6FD-41DF85B6060B}" presName="DropPin" presStyleLbl="alignNode1" presStyleIdx="0" presStyleCnt="12"/>
       <dgm:spPr/>
     </dgm:pt>
     <dgm:pt modelId="{3941855B-9F45-4A82-956B-02684A432AA5}" type="pres">
-      <dgm:prSet presAssocID="{CF314EE2-D6D7-4536-A6FD-41DF85B6060B}" presName="Ellipse" presStyleLbl="fgAcc1" presStyleIdx="0" presStyleCnt="5"/>
+      <dgm:prSet presAssocID="{CF314EE2-D6D7-4536-A6FD-41DF85B6060B}" presName="Ellipse" presStyleLbl="fgAcc1" presStyleIdx="0" presStyleCnt="6"/>
       <dgm:spPr>
         <a:solidFill>
           <a:schemeClr val="accent1">
@@ -2177,7 +2254,7 @@
       </dgm:spPr>
     </dgm:pt>
     <dgm:pt modelId="{31877334-3A87-4D72-A1B1-F99AFF9D710D}" type="pres">
-      <dgm:prSet presAssocID="{CF314EE2-D6D7-4536-A6FD-41DF85B6060B}" presName="L2TextContainer" presStyleLbl="revTx" presStyleIdx="0" presStyleCnt="5">
+      <dgm:prSet presAssocID="{CF314EE2-D6D7-4536-A6FD-41DF85B6060B}" presName="L2TextContainer" presStyleLbl="revTx" presStyleIdx="0" presStyleCnt="6">
         <dgm:presLayoutVars>
           <dgm:bulletEnabled val="1"/>
         </dgm:presLayoutVars>
@@ -2185,7 +2262,7 @@
       <dgm:spPr/>
     </dgm:pt>
     <dgm:pt modelId="{01E41ACE-E33B-41B9-A714-73522D3F7C76}" type="pres">
-      <dgm:prSet presAssocID="{CF314EE2-D6D7-4536-A6FD-41DF85B6060B}" presName="L1TextContainer" presStyleLbl="alignNode1" presStyleIdx="1" presStyleCnt="10">
+      <dgm:prSet presAssocID="{CF314EE2-D6D7-4536-A6FD-41DF85B6060B}" presName="L1TextContainer" presStyleLbl="alignNode1" presStyleIdx="1" presStyleCnt="12">
         <dgm:presLayoutVars>
           <dgm:chMax val="1"/>
           <dgm:chPref val="1"/>
@@ -2195,7 +2272,7 @@
       <dgm:spPr/>
     </dgm:pt>
     <dgm:pt modelId="{CEE8CE24-AD73-4777-BAB3-4A5D9CE74308}" type="pres">
-      <dgm:prSet presAssocID="{CF314EE2-D6D7-4536-A6FD-41DF85B6060B}" presName="ConnectLine" presStyleLbl="sibTrans1D1" presStyleIdx="0" presStyleCnt="5"/>
+      <dgm:prSet presAssocID="{CF314EE2-D6D7-4536-A6FD-41DF85B6060B}" presName="ConnectLine" presStyleLbl="sibTrans1D1" presStyleIdx="0" presStyleCnt="6"/>
       <dgm:spPr/>
     </dgm:pt>
     <dgm:pt modelId="{CA0DAB95-CF81-4C72-99EC-F6A08D694850}" type="pres">
@@ -2211,7 +2288,7 @@
       <dgm:spPr/>
     </dgm:pt>
     <dgm:pt modelId="{0D3203CA-3A44-4E67-9918-35447FA83302}" type="pres">
-      <dgm:prSet presAssocID="{DB0F8EA1-4EC9-4B36-B3A0-726A64C3981F}" presName="ConnectorPoint" presStyleLbl="lnNode1" presStyleIdx="1" presStyleCnt="5"/>
+      <dgm:prSet presAssocID="{DB0F8EA1-4EC9-4B36-B3A0-726A64C3981F}" presName="ConnectorPoint" presStyleLbl="lnNode1" presStyleIdx="1" presStyleCnt="6"/>
       <dgm:spPr>
         <a:solidFill>
           <a:schemeClr val="accent1">
@@ -2241,11 +2318,11 @@
       <dgm:spPr/>
     </dgm:pt>
     <dgm:pt modelId="{DC0398C9-F266-4E41-85EE-CAB679514169}" type="pres">
-      <dgm:prSet presAssocID="{DB0F8EA1-4EC9-4B36-B3A0-726A64C3981F}" presName="DropPin" presStyleLbl="alignNode1" presStyleIdx="2" presStyleCnt="10"/>
+      <dgm:prSet presAssocID="{DB0F8EA1-4EC9-4B36-B3A0-726A64C3981F}" presName="DropPin" presStyleLbl="alignNode1" presStyleIdx="2" presStyleCnt="12"/>
       <dgm:spPr/>
     </dgm:pt>
     <dgm:pt modelId="{591D0C9E-F3BD-4ACE-A927-797BE3DA39DF}" type="pres">
-      <dgm:prSet presAssocID="{DB0F8EA1-4EC9-4B36-B3A0-726A64C3981F}" presName="Ellipse" presStyleLbl="fgAcc1" presStyleIdx="1" presStyleCnt="5"/>
+      <dgm:prSet presAssocID="{DB0F8EA1-4EC9-4B36-B3A0-726A64C3981F}" presName="Ellipse" presStyleLbl="fgAcc1" presStyleIdx="1" presStyleCnt="6"/>
       <dgm:spPr>
         <a:solidFill>
           <a:schemeClr val="accent1">
@@ -2265,7 +2342,7 @@
       </dgm:spPr>
     </dgm:pt>
     <dgm:pt modelId="{443870C5-2799-47B5-AA6B-A0C45107D3FC}" type="pres">
-      <dgm:prSet presAssocID="{DB0F8EA1-4EC9-4B36-B3A0-726A64C3981F}" presName="L2TextContainer" presStyleLbl="revTx" presStyleIdx="1" presStyleCnt="5">
+      <dgm:prSet presAssocID="{DB0F8EA1-4EC9-4B36-B3A0-726A64C3981F}" presName="L2TextContainer" presStyleLbl="revTx" presStyleIdx="1" presStyleCnt="6">
         <dgm:presLayoutVars>
           <dgm:bulletEnabled val="1"/>
         </dgm:presLayoutVars>
@@ -2273,7 +2350,7 @@
       <dgm:spPr/>
     </dgm:pt>
     <dgm:pt modelId="{89EF5014-7ECE-4300-A882-B69FFA73745D}" type="pres">
-      <dgm:prSet presAssocID="{DB0F8EA1-4EC9-4B36-B3A0-726A64C3981F}" presName="L1TextContainer" presStyleLbl="alignNode1" presStyleIdx="3" presStyleCnt="10">
+      <dgm:prSet presAssocID="{DB0F8EA1-4EC9-4B36-B3A0-726A64C3981F}" presName="L1TextContainer" presStyleLbl="alignNode1" presStyleIdx="3" presStyleCnt="12">
         <dgm:presLayoutVars>
           <dgm:chMax val="1"/>
           <dgm:chPref val="1"/>
@@ -2283,7 +2360,7 @@
       <dgm:spPr/>
     </dgm:pt>
     <dgm:pt modelId="{7FC7980B-78D1-4A8D-9208-76052E50D81B}" type="pres">
-      <dgm:prSet presAssocID="{DB0F8EA1-4EC9-4B36-B3A0-726A64C3981F}" presName="ConnectLine" presStyleLbl="sibTrans1D1" presStyleIdx="1" presStyleCnt="5"/>
+      <dgm:prSet presAssocID="{DB0F8EA1-4EC9-4B36-B3A0-726A64C3981F}" presName="ConnectLine" presStyleLbl="sibTrans1D1" presStyleIdx="1" presStyleCnt="6"/>
       <dgm:spPr/>
     </dgm:pt>
     <dgm:pt modelId="{2A9B783C-D24D-49E5-BA81-DDD844BCDDD5}" type="pres">
@@ -2294,12 +2371,100 @@
       <dgm:prSet presAssocID="{08BC88D8-82C0-4A30-9ABA-A0DE6ABB8151}" presName="spaceBetweenRectangles" presStyleCnt="0"/>
       <dgm:spPr/>
     </dgm:pt>
+    <dgm:pt modelId="{CF50A41E-3DDD-40CD-ACA2-EAAFB95D23C9}" type="pres">
+      <dgm:prSet presAssocID="{577E2A15-6446-4395-82B0-C620FF41CF3E}" presName="composite" presStyleCnt="0"/>
+      <dgm:spPr/>
+    </dgm:pt>
+    <dgm:pt modelId="{AF74090F-5DD0-421A-8442-5D7C388EC70E}" type="pres">
+      <dgm:prSet presAssocID="{577E2A15-6446-4395-82B0-C620FF41CF3E}" presName="ConnectorPoint" presStyleLbl="lnNode1" presStyleIdx="2" presStyleCnt="6"/>
+      <dgm:spPr>
+        <a:solidFill>
+          <a:schemeClr val="accent1">
+            <a:hueOff val="0"/>
+            <a:satOff val="0"/>
+            <a:lumOff val="0"/>
+            <a:alphaOff val="0"/>
+          </a:schemeClr>
+        </a:solidFill>
+        <a:ln w="6350" cap="flat" cmpd="sng" algn="ctr">
+          <a:solidFill>
+            <a:schemeClr val="lt1">
+              <a:hueOff val="0"/>
+              <a:satOff val="0"/>
+              <a:lumOff val="0"/>
+              <a:alphaOff val="0"/>
+            </a:schemeClr>
+          </a:solidFill>
+          <a:prstDash val="solid"/>
+          <a:miter lim="800000"/>
+        </a:ln>
+        <a:effectLst/>
+      </dgm:spPr>
+    </dgm:pt>
+    <dgm:pt modelId="{8A4FA058-ED32-496A-9F26-032899AA124E}" type="pres">
+      <dgm:prSet presAssocID="{577E2A15-6446-4395-82B0-C620FF41CF3E}" presName="DropPinPlaceHolder" presStyleCnt="0"/>
+      <dgm:spPr/>
+    </dgm:pt>
+    <dgm:pt modelId="{6929D9D2-0A51-432F-871D-51370325AA3D}" type="pres">
+      <dgm:prSet presAssocID="{577E2A15-6446-4395-82B0-C620FF41CF3E}" presName="DropPin" presStyleLbl="alignNode1" presStyleIdx="4" presStyleCnt="12"/>
+      <dgm:spPr/>
+    </dgm:pt>
+    <dgm:pt modelId="{316AFCE1-05D5-4FBF-9DD0-66F6FC68FE60}" type="pres">
+      <dgm:prSet presAssocID="{577E2A15-6446-4395-82B0-C620FF41CF3E}" presName="Ellipse" presStyleLbl="fgAcc1" presStyleIdx="2" presStyleCnt="6"/>
+      <dgm:spPr>
+        <a:solidFill>
+          <a:schemeClr val="accent1">
+            <a:alpha val="90000"/>
+            <a:hueOff val="0"/>
+            <a:satOff val="0"/>
+            <a:lumOff val="0"/>
+            <a:alphaOff val="0"/>
+          </a:schemeClr>
+        </a:solidFill>
+        <a:ln w="19050" cap="flat" cmpd="sng" algn="ctr">
+          <a:noFill/>
+          <a:prstDash val="solid"/>
+          <a:miter lim="800000"/>
+        </a:ln>
+        <a:effectLst/>
+      </dgm:spPr>
+    </dgm:pt>
+    <dgm:pt modelId="{4EFA55F0-9851-4A7D-B4C2-406FA2DDC290}" type="pres">
+      <dgm:prSet presAssocID="{577E2A15-6446-4395-82B0-C620FF41CF3E}" presName="L2TextContainer" presStyleLbl="revTx" presStyleIdx="2" presStyleCnt="6">
+        <dgm:presLayoutVars>
+          <dgm:bulletEnabled val="1"/>
+        </dgm:presLayoutVars>
+      </dgm:prSet>
+      <dgm:spPr/>
+    </dgm:pt>
+    <dgm:pt modelId="{8ED051A1-811D-4C38-B101-1F9FB6E68C2F}" type="pres">
+      <dgm:prSet presAssocID="{577E2A15-6446-4395-82B0-C620FF41CF3E}" presName="L1TextContainer" presStyleLbl="alignNode1" presStyleIdx="5" presStyleCnt="12">
+        <dgm:presLayoutVars>
+          <dgm:chMax val="1"/>
+          <dgm:chPref val="1"/>
+          <dgm:bulletEnabled val="1"/>
+        </dgm:presLayoutVars>
+      </dgm:prSet>
+      <dgm:spPr/>
+    </dgm:pt>
+    <dgm:pt modelId="{39358395-8FDB-4859-B0D5-418F40A118A6}" type="pres">
+      <dgm:prSet presAssocID="{577E2A15-6446-4395-82B0-C620FF41CF3E}" presName="ConnectLine" presStyleLbl="sibTrans1D1" presStyleIdx="2" presStyleCnt="6"/>
+      <dgm:spPr/>
+    </dgm:pt>
+    <dgm:pt modelId="{F896B363-D757-4D61-BDC4-7B4D48E4E062}" type="pres">
+      <dgm:prSet presAssocID="{577E2A15-6446-4395-82B0-C620FF41CF3E}" presName="EmptyPlaceHolder" presStyleCnt="0"/>
+      <dgm:spPr/>
+    </dgm:pt>
+    <dgm:pt modelId="{C0C43931-B00D-4A56-A5A6-80A44EF83806}" type="pres">
+      <dgm:prSet presAssocID="{D48C33DC-F667-4A06-A064-CC92496C94EA}" presName="spaceBetweenRectangles" presStyleCnt="0"/>
+      <dgm:spPr/>
+    </dgm:pt>
     <dgm:pt modelId="{538F7CB4-9A53-484B-81CA-260A79B4F163}" type="pres">
       <dgm:prSet presAssocID="{D50E325C-02F8-4636-83C7-06D5FCD3BA82}" presName="composite" presStyleCnt="0"/>
       <dgm:spPr/>
     </dgm:pt>
     <dgm:pt modelId="{682EA88A-A4E4-4AA7-9FB1-B83F193F2C39}" type="pres">
-      <dgm:prSet presAssocID="{D50E325C-02F8-4636-83C7-06D5FCD3BA82}" presName="ConnectorPoint" presStyleLbl="lnNode1" presStyleIdx="2" presStyleCnt="5"/>
+      <dgm:prSet presAssocID="{D50E325C-02F8-4636-83C7-06D5FCD3BA82}" presName="ConnectorPoint" presStyleLbl="lnNode1" presStyleIdx="3" presStyleCnt="6"/>
       <dgm:spPr>
         <a:solidFill>
           <a:schemeClr val="accent1">
@@ -2329,11 +2494,11 @@
       <dgm:spPr/>
     </dgm:pt>
     <dgm:pt modelId="{4E9D8699-570F-428F-B34E-A8AE18B2A17F}" type="pres">
-      <dgm:prSet presAssocID="{D50E325C-02F8-4636-83C7-06D5FCD3BA82}" presName="DropPin" presStyleLbl="alignNode1" presStyleIdx="4" presStyleCnt="10"/>
+      <dgm:prSet presAssocID="{D50E325C-02F8-4636-83C7-06D5FCD3BA82}" presName="DropPin" presStyleLbl="alignNode1" presStyleIdx="6" presStyleCnt="12"/>
       <dgm:spPr/>
     </dgm:pt>
     <dgm:pt modelId="{64CCA8F3-173A-4D74-B9A2-49BDD6D8183A}" type="pres">
-      <dgm:prSet presAssocID="{D50E325C-02F8-4636-83C7-06D5FCD3BA82}" presName="Ellipse" presStyleLbl="fgAcc1" presStyleIdx="2" presStyleCnt="5"/>
+      <dgm:prSet presAssocID="{D50E325C-02F8-4636-83C7-06D5FCD3BA82}" presName="Ellipse" presStyleLbl="fgAcc1" presStyleIdx="3" presStyleCnt="6"/>
       <dgm:spPr>
         <a:solidFill>
           <a:schemeClr val="accent1">
@@ -2353,7 +2518,7 @@
       </dgm:spPr>
     </dgm:pt>
     <dgm:pt modelId="{00D2B9ED-BE51-47B3-B26C-BA45F9641DBB}" type="pres">
-      <dgm:prSet presAssocID="{D50E325C-02F8-4636-83C7-06D5FCD3BA82}" presName="L2TextContainer" presStyleLbl="revTx" presStyleIdx="2" presStyleCnt="5">
+      <dgm:prSet presAssocID="{D50E325C-02F8-4636-83C7-06D5FCD3BA82}" presName="L2TextContainer" presStyleLbl="revTx" presStyleIdx="3" presStyleCnt="6">
         <dgm:presLayoutVars>
           <dgm:bulletEnabled val="1"/>
         </dgm:presLayoutVars>
@@ -2361,7 +2526,7 @@
       <dgm:spPr/>
     </dgm:pt>
     <dgm:pt modelId="{2664027A-B5AC-41CA-A071-5DF0CF1E8120}" type="pres">
-      <dgm:prSet presAssocID="{D50E325C-02F8-4636-83C7-06D5FCD3BA82}" presName="L1TextContainer" presStyleLbl="alignNode1" presStyleIdx="5" presStyleCnt="10">
+      <dgm:prSet presAssocID="{D50E325C-02F8-4636-83C7-06D5FCD3BA82}" presName="L1TextContainer" presStyleLbl="alignNode1" presStyleIdx="7" presStyleCnt="12">
         <dgm:presLayoutVars>
           <dgm:chMax val="1"/>
           <dgm:chPref val="1"/>
@@ -2371,7 +2536,7 @@
       <dgm:spPr/>
     </dgm:pt>
     <dgm:pt modelId="{6F004247-9FD8-4E6D-9363-DE121E4356A0}" type="pres">
-      <dgm:prSet presAssocID="{D50E325C-02F8-4636-83C7-06D5FCD3BA82}" presName="ConnectLine" presStyleLbl="sibTrans1D1" presStyleIdx="2" presStyleCnt="5"/>
+      <dgm:prSet presAssocID="{D50E325C-02F8-4636-83C7-06D5FCD3BA82}" presName="ConnectLine" presStyleLbl="sibTrans1D1" presStyleIdx="3" presStyleCnt="6"/>
       <dgm:spPr/>
     </dgm:pt>
     <dgm:pt modelId="{5A9AD2D3-337B-4134-B8ED-771B806C587F}" type="pres">
@@ -2387,7 +2552,7 @@
       <dgm:spPr/>
     </dgm:pt>
     <dgm:pt modelId="{410FA866-99AD-47B6-AB30-6629B2F7603F}" type="pres">
-      <dgm:prSet presAssocID="{16BBC706-20BB-4DAB-BE2E-AFABD3EB8DF4}" presName="ConnectorPoint" presStyleLbl="lnNode1" presStyleIdx="3" presStyleCnt="5"/>
+      <dgm:prSet presAssocID="{16BBC706-20BB-4DAB-BE2E-AFABD3EB8DF4}" presName="ConnectorPoint" presStyleLbl="lnNode1" presStyleIdx="4" presStyleCnt="6"/>
       <dgm:spPr>
         <a:solidFill>
           <a:schemeClr val="accent1">
@@ -2417,11 +2582,11 @@
       <dgm:spPr/>
     </dgm:pt>
     <dgm:pt modelId="{1D54DDC9-D893-4C2D-937E-BD8391046565}" type="pres">
-      <dgm:prSet presAssocID="{16BBC706-20BB-4DAB-BE2E-AFABD3EB8DF4}" presName="DropPin" presStyleLbl="alignNode1" presStyleIdx="6" presStyleCnt="10"/>
+      <dgm:prSet presAssocID="{16BBC706-20BB-4DAB-BE2E-AFABD3EB8DF4}" presName="DropPin" presStyleLbl="alignNode1" presStyleIdx="8" presStyleCnt="12"/>
       <dgm:spPr/>
     </dgm:pt>
     <dgm:pt modelId="{A8F6EDE2-EF0C-457E-BC04-95B7917B5FF1}" type="pres">
-      <dgm:prSet presAssocID="{16BBC706-20BB-4DAB-BE2E-AFABD3EB8DF4}" presName="Ellipse" presStyleLbl="fgAcc1" presStyleIdx="3" presStyleCnt="5"/>
+      <dgm:prSet presAssocID="{16BBC706-20BB-4DAB-BE2E-AFABD3EB8DF4}" presName="Ellipse" presStyleLbl="fgAcc1" presStyleIdx="4" presStyleCnt="6"/>
       <dgm:spPr>
         <a:solidFill>
           <a:schemeClr val="accent1">
@@ -2441,7 +2606,7 @@
       </dgm:spPr>
     </dgm:pt>
     <dgm:pt modelId="{229A8B9E-D26E-4B8B-B637-778F404FB5B5}" type="pres">
-      <dgm:prSet presAssocID="{16BBC706-20BB-4DAB-BE2E-AFABD3EB8DF4}" presName="L2TextContainer" presStyleLbl="revTx" presStyleIdx="3" presStyleCnt="5">
+      <dgm:prSet presAssocID="{16BBC706-20BB-4DAB-BE2E-AFABD3EB8DF4}" presName="L2TextContainer" presStyleLbl="revTx" presStyleIdx="4" presStyleCnt="6">
         <dgm:presLayoutVars>
           <dgm:bulletEnabled val="1"/>
         </dgm:presLayoutVars>
@@ -2449,7 +2614,7 @@
       <dgm:spPr/>
     </dgm:pt>
     <dgm:pt modelId="{EE41F65A-AA70-4EE3-81F3-A539EF20984B}" type="pres">
-      <dgm:prSet presAssocID="{16BBC706-20BB-4DAB-BE2E-AFABD3EB8DF4}" presName="L1TextContainer" presStyleLbl="alignNode1" presStyleIdx="7" presStyleCnt="10">
+      <dgm:prSet presAssocID="{16BBC706-20BB-4DAB-BE2E-AFABD3EB8DF4}" presName="L1TextContainer" presStyleLbl="alignNode1" presStyleIdx="9" presStyleCnt="12">
         <dgm:presLayoutVars>
           <dgm:chMax val="1"/>
           <dgm:chPref val="1"/>
@@ -2459,7 +2624,7 @@
       <dgm:spPr/>
     </dgm:pt>
     <dgm:pt modelId="{E28909AF-007C-49D7-8958-97FF1699473D}" type="pres">
-      <dgm:prSet presAssocID="{16BBC706-20BB-4DAB-BE2E-AFABD3EB8DF4}" presName="ConnectLine" presStyleLbl="sibTrans1D1" presStyleIdx="3" presStyleCnt="5"/>
+      <dgm:prSet presAssocID="{16BBC706-20BB-4DAB-BE2E-AFABD3EB8DF4}" presName="ConnectLine" presStyleLbl="sibTrans1D1" presStyleIdx="4" presStyleCnt="6"/>
       <dgm:spPr/>
     </dgm:pt>
     <dgm:pt modelId="{6C0C9696-FE62-48F7-8988-6F70C68CBD83}" type="pres">
@@ -2475,7 +2640,7 @@
       <dgm:spPr/>
     </dgm:pt>
     <dgm:pt modelId="{D1F0411E-85F0-49A3-90A8-C760162A06F7}" type="pres">
-      <dgm:prSet presAssocID="{D58E6C69-1D05-44C2-9491-5FDB663AAFB1}" presName="ConnectorPoint" presStyleLbl="lnNode1" presStyleIdx="4" presStyleCnt="5"/>
+      <dgm:prSet presAssocID="{D58E6C69-1D05-44C2-9491-5FDB663AAFB1}" presName="ConnectorPoint" presStyleLbl="lnNode1" presStyleIdx="5" presStyleCnt="6"/>
       <dgm:spPr>
         <a:solidFill>
           <a:schemeClr val="accent1">
@@ -2505,11 +2670,11 @@
       <dgm:spPr/>
     </dgm:pt>
     <dgm:pt modelId="{061DA4A7-7DD3-47A6-8F75-591FD3C5F66E}" type="pres">
-      <dgm:prSet presAssocID="{D58E6C69-1D05-44C2-9491-5FDB663AAFB1}" presName="DropPin" presStyleLbl="alignNode1" presStyleIdx="8" presStyleCnt="10"/>
+      <dgm:prSet presAssocID="{D58E6C69-1D05-44C2-9491-5FDB663AAFB1}" presName="DropPin" presStyleLbl="alignNode1" presStyleIdx="10" presStyleCnt="12"/>
       <dgm:spPr/>
     </dgm:pt>
     <dgm:pt modelId="{0E07606D-90D6-4C46-9C6F-D1FA7A46AD31}" type="pres">
-      <dgm:prSet presAssocID="{D58E6C69-1D05-44C2-9491-5FDB663AAFB1}" presName="Ellipse" presStyleLbl="fgAcc1" presStyleIdx="4" presStyleCnt="5"/>
+      <dgm:prSet presAssocID="{D58E6C69-1D05-44C2-9491-5FDB663AAFB1}" presName="Ellipse" presStyleLbl="fgAcc1" presStyleIdx="5" presStyleCnt="6"/>
       <dgm:spPr>
         <a:solidFill>
           <a:schemeClr val="accent1">
@@ -2529,7 +2694,7 @@
       </dgm:spPr>
     </dgm:pt>
     <dgm:pt modelId="{A8C61B89-04C1-40B8-A753-92BDABE39300}" type="pres">
-      <dgm:prSet presAssocID="{D58E6C69-1D05-44C2-9491-5FDB663AAFB1}" presName="L2TextContainer" presStyleLbl="revTx" presStyleIdx="4" presStyleCnt="5">
+      <dgm:prSet presAssocID="{D58E6C69-1D05-44C2-9491-5FDB663AAFB1}" presName="L2TextContainer" presStyleLbl="revTx" presStyleIdx="5" presStyleCnt="6">
         <dgm:presLayoutVars>
           <dgm:bulletEnabled val="1"/>
         </dgm:presLayoutVars>
@@ -2537,7 +2702,7 @@
       <dgm:spPr/>
     </dgm:pt>
     <dgm:pt modelId="{F7F215AA-1548-4946-9818-24CE434B0257}" type="pres">
-      <dgm:prSet presAssocID="{D58E6C69-1D05-44C2-9491-5FDB663AAFB1}" presName="L1TextContainer" presStyleLbl="alignNode1" presStyleIdx="9" presStyleCnt="10">
+      <dgm:prSet presAssocID="{D58E6C69-1D05-44C2-9491-5FDB663AAFB1}" presName="L1TextContainer" presStyleLbl="alignNode1" presStyleIdx="11" presStyleCnt="12">
         <dgm:presLayoutVars>
           <dgm:chMax val="1"/>
           <dgm:chPref val="1"/>
@@ -2547,7 +2712,7 @@
       <dgm:spPr/>
     </dgm:pt>
     <dgm:pt modelId="{A657FCB3-50B0-4F61-A00C-56D9B387AFBF}" type="pres">
-      <dgm:prSet presAssocID="{D58E6C69-1D05-44C2-9491-5FDB663AAFB1}" presName="ConnectLine" presStyleLbl="sibTrans1D1" presStyleIdx="4" presStyleCnt="5"/>
+      <dgm:prSet presAssocID="{D58E6C69-1D05-44C2-9491-5FDB663AAFB1}" presName="ConnectLine" presStyleLbl="sibTrans1D1" presStyleIdx="5" presStyleCnt="6"/>
       <dgm:spPr/>
     </dgm:pt>
     <dgm:pt modelId="{7D6140CA-EF57-4603-ADAF-5E5FB81F7207}" type="pres">
@@ -2556,78 +2721,92 @@
     </dgm:pt>
   </dgm:ptLst>
   <dgm:cxnLst>
-    <dgm:cxn modelId="{9F7E5305-A7C0-42ED-A7D0-C07C3E5B9FE1}" type="presOf" srcId="{CF314EE2-D6D7-4536-A6FD-41DF85B6060B}" destId="{01E41ACE-E33B-41B9-A714-73522D3F7C76}" srcOrd="0" destOrd="0" presId="urn:microsoft.com/office/officeart/2024/3/layout/SimpleTimelineDefaultVariant"/>
-    <dgm:cxn modelId="{5256960A-E2B8-4EA0-9FD8-757FABFF6D21}" srcId="{2430CC21-05DE-42C5-993E-E946140B4D86}" destId="{D58E6C69-1D05-44C2-9491-5FDB663AAFB1}" srcOrd="4" destOrd="0" parTransId="{5A34F788-8BB8-41E7-B4B9-5FA4F647078C}" sibTransId="{7B85E398-94A7-4AB5-8CDF-7F81E2F539B1}"/>
-    <dgm:cxn modelId="{CCCB8F17-CC10-4903-A903-872FB70B8099}" type="presOf" srcId="{15D026C8-3FA6-448A-A3BC-AAA5CEA229FC}" destId="{443870C5-2799-47B5-AA6B-A0C45107D3FC}" srcOrd="0" destOrd="0" presId="urn:microsoft.com/office/officeart/2024/3/layout/SimpleTimelineDefaultVariant"/>
+    <dgm:cxn modelId="{ADAA6806-730E-45AF-AC0C-82BEA4959E6B}" type="presOf" srcId="{D58E6C69-1D05-44C2-9491-5FDB663AAFB1}" destId="{F7F215AA-1548-4946-9818-24CE434B0257}" srcOrd="0" destOrd="0" presId="urn:microsoft.com/office/officeart/2024/3/layout/SimpleTimelineDefaultVariant"/>
+    <dgm:cxn modelId="{5256960A-E2B8-4EA0-9FD8-757FABFF6D21}" srcId="{2430CC21-05DE-42C5-993E-E946140B4D86}" destId="{D58E6C69-1D05-44C2-9491-5FDB663AAFB1}" srcOrd="5" destOrd="0" parTransId="{5A34F788-8BB8-41E7-B4B9-5FA4F647078C}" sibTransId="{7B85E398-94A7-4AB5-8CDF-7F81E2F539B1}"/>
+    <dgm:cxn modelId="{05E33E0B-9B47-4AFC-B5E9-53BD3AD1ED28}" type="presOf" srcId="{15D026C8-3FA6-448A-A3BC-AAA5CEA229FC}" destId="{4EFA55F0-9851-4A7D-B4C2-406FA2DDC290}" srcOrd="0" destOrd="0" presId="urn:microsoft.com/office/officeart/2024/3/layout/SimpleTimelineDefaultVariant"/>
+    <dgm:cxn modelId="{2C719D19-108B-42D6-9189-5E0855741125}" type="presOf" srcId="{577E2A15-6446-4395-82B0-C620FF41CF3E}" destId="{8ED051A1-811D-4C38-B101-1F9FB6E68C2F}" srcOrd="0" destOrd="0" presId="urn:microsoft.com/office/officeart/2024/3/layout/SimpleTimelineDefaultVariant"/>
     <dgm:cxn modelId="{FF84021C-D09A-4251-87DC-BF866E852213}" srcId="{CF314EE2-D6D7-4536-A6FD-41DF85B6060B}" destId="{9F792233-6D2D-4F91-A8EB-9D8F22D4829D}" srcOrd="0" destOrd="0" parTransId="{36D0B96F-9F6E-4190-9C30-8339340786C1}" sibTransId="{B8159D87-D080-4B9F-BD24-7251D51546B6}"/>
-    <dgm:cxn modelId="{5E22A32E-42E7-41FC-BA78-0D55911763D3}" type="presOf" srcId="{DB0F8EA1-4EC9-4B36-B3A0-726A64C3981F}" destId="{89EF5014-7ECE-4300-A882-B69FFA73745D}" srcOrd="0" destOrd="0" presId="urn:microsoft.com/office/officeart/2024/3/layout/SimpleTimelineDefaultVariant"/>
+    <dgm:cxn modelId="{728CC021-3414-4744-9F41-1AE73AACF141}" type="presOf" srcId="{C8B2B04D-0778-4C93-AAC3-3963613D13A6}" destId="{443870C5-2799-47B5-AA6B-A0C45107D3FC}" srcOrd="0" destOrd="0" presId="urn:microsoft.com/office/officeart/2024/3/layout/SimpleTimelineDefaultVariant"/>
+    <dgm:cxn modelId="{3EBE1623-CA62-4238-AD39-FA1D7CE55DE3}" type="presOf" srcId="{CF314EE2-D6D7-4536-A6FD-41DF85B6060B}" destId="{01E41ACE-E33B-41B9-A714-73522D3F7C76}" srcOrd="0" destOrd="0" presId="urn:microsoft.com/office/officeart/2024/3/layout/SimpleTimelineDefaultVariant"/>
     <dgm:cxn modelId="{3467A331-0E39-4B91-A698-B6CF31926ABD}" srcId="{2430CC21-05DE-42C5-993E-E946140B4D86}" destId="{DB0F8EA1-4EC9-4B36-B3A0-726A64C3981F}" srcOrd="1" destOrd="0" parTransId="{3D13D3C0-A39B-408B-A8DC-477DE50366DC}" sibTransId="{08BC88D8-82C0-4A30-9ABA-A0DE6ABB8151}"/>
+    <dgm:cxn modelId="{010CD335-6C9C-401C-AB91-6BE655640365}" srcId="{DB0F8EA1-4EC9-4B36-B3A0-726A64C3981F}" destId="{C8B2B04D-0778-4C93-AAC3-3963613D13A6}" srcOrd="0" destOrd="0" parTransId="{C9ED31B7-D10C-406B-9704-8F1DDF1B78E5}" sibTransId="{989ADA22-204C-429C-9D04-88632C6861CE}"/>
     <dgm:cxn modelId="{7C55105F-60DE-48A6-9748-219EB1406961}" srcId="{D58E6C69-1D05-44C2-9491-5FDB663AAFB1}" destId="{C65E3B61-EBF5-4BE9-9C69-BC45396A57AD}" srcOrd="0" destOrd="0" parTransId="{4C424451-E7F8-4165-AB39-A4B9981ECD8D}" sibTransId="{91360B95-3742-41EC-B2BD-D9DE7C6F2A81}"/>
     <dgm:cxn modelId="{4E621261-5009-4A18-83C9-97E356045B17}" type="presOf" srcId="{2430CC21-05DE-42C5-993E-E946140B4D86}" destId="{9AE89FB1-F474-491F-AB27-A0F134775DF5}" srcOrd="0" destOrd="0" presId="urn:microsoft.com/office/officeart/2024/3/layout/SimpleTimelineDefaultVariant"/>
-    <dgm:cxn modelId="{B11FA945-4449-4D5F-A93D-3262FD9FF2EE}" type="presOf" srcId="{925E6D1D-D87D-40EB-9615-95968B35A91B}" destId="{00D2B9ED-BE51-47B3-B26C-BA45F9641DBB}" srcOrd="0" destOrd="0" presId="urn:microsoft.com/office/officeart/2024/3/layout/SimpleTimelineDefaultVariant"/>
-    <dgm:cxn modelId="{47DE2271-EB1F-440E-9F73-42D4EED37E96}" type="presOf" srcId="{D50E325C-02F8-4636-83C7-06D5FCD3BA82}" destId="{2664027A-B5AC-41CA-A071-5DF0CF1E8120}" srcOrd="0" destOrd="0" presId="urn:microsoft.com/office/officeart/2024/3/layout/SimpleTimelineDefaultVariant"/>
-    <dgm:cxn modelId="{3629B453-7417-4848-A59B-0DC341C4E48B}" type="presOf" srcId="{C65E3B61-EBF5-4BE9-9C69-BC45396A57AD}" destId="{A8C61B89-04C1-40B8-A753-92BDABE39300}" srcOrd="0" destOrd="0" presId="urn:microsoft.com/office/officeart/2024/3/layout/SimpleTimelineDefaultVariant"/>
-    <dgm:cxn modelId="{5B03E37C-4FA6-4FE3-9CC9-C9BE34E43339}" srcId="{DB0F8EA1-4EC9-4B36-B3A0-726A64C3981F}" destId="{15D026C8-3FA6-448A-A3BC-AAA5CEA229FC}" srcOrd="0" destOrd="0" parTransId="{57134387-37E6-4073-B620-EB2BC76CDF46}" sibTransId="{E937AFED-88C7-4905-9A04-A9EE8FF53C44}"/>
+    <dgm:cxn modelId="{625C2345-3A48-4F2B-A62B-723483751173}" type="presOf" srcId="{9F792233-6D2D-4F91-A8EB-9D8F22D4829D}" destId="{31877334-3A87-4D72-A1B1-F99AFF9D710D}" srcOrd="0" destOrd="0" presId="urn:microsoft.com/office/officeart/2024/3/layout/SimpleTimelineDefaultVariant"/>
+    <dgm:cxn modelId="{5B03E37C-4FA6-4FE3-9CC9-C9BE34E43339}" srcId="{577E2A15-6446-4395-82B0-C620FF41CF3E}" destId="{15D026C8-3FA6-448A-A3BC-AAA5CEA229FC}" srcOrd="0" destOrd="0" parTransId="{57134387-37E6-4073-B620-EB2BC76CDF46}" sibTransId="{E937AFED-88C7-4905-9A04-A9EE8FF53C44}"/>
+    <dgm:cxn modelId="{7FEADA7E-6E0C-48C6-B36B-6BA3198B2D66}" type="presOf" srcId="{16BBC706-20BB-4DAB-BE2E-AFABD3EB8DF4}" destId="{EE41F65A-AA70-4EE3-81F3-A539EF20984B}" srcOrd="0" destOrd="0" presId="urn:microsoft.com/office/officeart/2024/3/layout/SimpleTimelineDefaultVariant"/>
+    <dgm:cxn modelId="{56D5FF89-4927-43E8-861C-E84F6C2BB1D5}" srcId="{2430CC21-05DE-42C5-993E-E946140B4D86}" destId="{577E2A15-6446-4395-82B0-C620FF41CF3E}" srcOrd="2" destOrd="0" parTransId="{E38A0B13-ED66-46E2-A3BC-087379B5508A}" sibTransId="{D48C33DC-F667-4A06-A064-CC92496C94EA}"/>
     <dgm:cxn modelId="{141C768B-5B29-4514-ADB9-DA4B47B9BB64}" srcId="{2430CC21-05DE-42C5-993E-E946140B4D86}" destId="{CF314EE2-D6D7-4536-A6FD-41DF85B6060B}" srcOrd="0" destOrd="0" parTransId="{5BED5465-B695-404C-AE81-2275201F5711}" sibTransId="{D0172F94-2558-45FD-BF33-041BFEBCEA23}"/>
-    <dgm:cxn modelId="{915FFF93-5E66-419D-9F43-1C4AE4341E66}" type="presOf" srcId="{9F792233-6D2D-4F91-A8EB-9D8F22D4829D}" destId="{31877334-3A87-4D72-A1B1-F99AFF9D710D}" srcOrd="0" destOrd="0" presId="urn:microsoft.com/office/officeart/2024/3/layout/SimpleTimelineDefaultVariant"/>
-    <dgm:cxn modelId="{9A54749F-3A2C-4DF7-9FBE-ADE63C233901}" type="presOf" srcId="{16BBC706-20BB-4DAB-BE2E-AFABD3EB8DF4}" destId="{EE41F65A-AA70-4EE3-81F3-A539EF20984B}" srcOrd="0" destOrd="0" presId="urn:microsoft.com/office/officeart/2024/3/layout/SimpleTimelineDefaultVariant"/>
+    <dgm:cxn modelId="{276A3E93-A6CA-4793-AB53-46977654970A}" type="presOf" srcId="{C9334617-D8FF-4772-940C-26C317DD1123}" destId="{229A8B9E-D26E-4B8B-B637-778F404FB5B5}" srcOrd="0" destOrd="0" presId="urn:microsoft.com/office/officeart/2024/3/layout/SimpleTimelineDefaultVariant"/>
+    <dgm:cxn modelId="{B5096D98-F201-4BAD-AD93-7A21430626EE}" type="presOf" srcId="{D50E325C-02F8-4636-83C7-06D5FCD3BA82}" destId="{2664027A-B5AC-41CA-A071-5DF0CF1E8120}" srcOrd="0" destOrd="0" presId="urn:microsoft.com/office/officeart/2024/3/layout/SimpleTimelineDefaultVariant"/>
     <dgm:cxn modelId="{9A7892A0-CAA6-4075-A2BC-E6CDABFCB58C}" srcId="{16BBC706-20BB-4DAB-BE2E-AFABD3EB8DF4}" destId="{C9334617-D8FF-4772-940C-26C317DD1123}" srcOrd="0" destOrd="0" parTransId="{77C439E6-73CD-4F75-87DB-459EDD8FCC6B}" sibTransId="{B6087F6D-C261-4E7A-9D17-3261F7DAB742}"/>
-    <dgm:cxn modelId="{A18F02A4-9CFB-46A9-9689-45F9B518FFD8}" srcId="{2430CC21-05DE-42C5-993E-E946140B4D86}" destId="{16BBC706-20BB-4DAB-BE2E-AFABD3EB8DF4}" srcOrd="3" destOrd="0" parTransId="{FFC39569-AC40-4992-905B-F5979F552B76}" sibTransId="{2BE8C82F-3D4F-4067-BF75-088338C4E144}"/>
-    <dgm:cxn modelId="{80E319D2-C14A-43B7-9AA9-466C9EC1600B}" type="presOf" srcId="{C9334617-D8FF-4772-940C-26C317DD1123}" destId="{229A8B9E-D26E-4B8B-B637-778F404FB5B5}" srcOrd="0" destOrd="0" presId="urn:microsoft.com/office/officeart/2024/3/layout/SimpleTimelineDefaultVariant"/>
-    <dgm:cxn modelId="{6ADE62D9-D3A1-41C4-887F-2D09D6882601}" srcId="{2430CC21-05DE-42C5-993E-E946140B4D86}" destId="{D50E325C-02F8-4636-83C7-06D5FCD3BA82}" srcOrd="2" destOrd="0" parTransId="{B10AAB54-8404-4113-AEA9-476DC7B36F38}" sibTransId="{235F5447-7591-489B-8E03-171373207EFC}"/>
-    <dgm:cxn modelId="{58F177DC-AFB8-439C-8A40-DC5092B9D1B8}" type="presOf" srcId="{D58E6C69-1D05-44C2-9491-5FDB663AAFB1}" destId="{F7F215AA-1548-4946-9818-24CE434B0257}" srcOrd="0" destOrd="0" presId="urn:microsoft.com/office/officeart/2024/3/layout/SimpleTimelineDefaultVariant"/>
+    <dgm:cxn modelId="{A18F02A4-9CFB-46A9-9689-45F9B518FFD8}" srcId="{2430CC21-05DE-42C5-993E-E946140B4D86}" destId="{16BBC706-20BB-4DAB-BE2E-AFABD3EB8DF4}" srcOrd="4" destOrd="0" parTransId="{FFC39569-AC40-4992-905B-F5979F552B76}" sibTransId="{2BE8C82F-3D4F-4067-BF75-088338C4E144}"/>
+    <dgm:cxn modelId="{21BD18BC-3171-4633-B564-72214D102F6C}" type="presOf" srcId="{925E6D1D-D87D-40EB-9615-95968B35A91B}" destId="{00D2B9ED-BE51-47B3-B26C-BA45F9641DBB}" srcOrd="0" destOrd="0" presId="urn:microsoft.com/office/officeart/2024/3/layout/SimpleTimelineDefaultVariant"/>
+    <dgm:cxn modelId="{485EA0C0-3BF1-44ED-9605-FF726F051E2B}" type="presOf" srcId="{DB0F8EA1-4EC9-4B36-B3A0-726A64C3981F}" destId="{89EF5014-7ECE-4300-A882-B69FFA73745D}" srcOrd="0" destOrd="0" presId="urn:microsoft.com/office/officeart/2024/3/layout/SimpleTimelineDefaultVariant"/>
+    <dgm:cxn modelId="{6ADE62D9-D3A1-41C4-887F-2D09D6882601}" srcId="{2430CC21-05DE-42C5-993E-E946140B4D86}" destId="{D50E325C-02F8-4636-83C7-06D5FCD3BA82}" srcOrd="3" destOrd="0" parTransId="{B10AAB54-8404-4113-AEA9-476DC7B36F38}" sibTransId="{235F5447-7591-489B-8E03-171373207EFC}"/>
+    <dgm:cxn modelId="{466875E9-F087-45F9-AD26-0FCD06AFEB7D}" type="presOf" srcId="{C65E3B61-EBF5-4BE9-9C69-BC45396A57AD}" destId="{A8C61B89-04C1-40B8-A753-92BDABE39300}" srcOrd="0" destOrd="0" presId="urn:microsoft.com/office/officeart/2024/3/layout/SimpleTimelineDefaultVariant"/>
     <dgm:cxn modelId="{1B79ADF3-BF05-49D6-A5B0-DDCC4D8861B9}" srcId="{D50E325C-02F8-4636-83C7-06D5FCD3BA82}" destId="{925E6D1D-D87D-40EB-9615-95968B35A91B}" srcOrd="0" destOrd="0" parTransId="{0F17F012-6AC8-4096-A067-F8D7A11F78A1}" sibTransId="{947CDB28-0A82-445F-95C7-C684DA134CE6}"/>
-    <dgm:cxn modelId="{066D5A18-2E8C-484C-9548-617963170ED8}" type="presParOf" srcId="{9AE89FB1-F474-491F-AB27-A0F134775DF5}" destId="{B7BF8D1E-0607-4B5F-981C-154E326D1064}" srcOrd="0" destOrd="0" presId="urn:microsoft.com/office/officeart/2024/3/layout/SimpleTimelineDefaultVariant"/>
-    <dgm:cxn modelId="{3B669F2F-0FD4-4A85-AA91-77EBDA8A24D3}" type="presParOf" srcId="{9AE89FB1-F474-491F-AB27-A0F134775DF5}" destId="{A7AE47DD-8DEC-4B56-9367-A4C3486B2D96}" srcOrd="1" destOrd="0" presId="urn:microsoft.com/office/officeart/2024/3/layout/SimpleTimelineDefaultVariant"/>
-    <dgm:cxn modelId="{74AB13B8-9874-406D-A536-8E1052005EA1}" type="presParOf" srcId="{A7AE47DD-8DEC-4B56-9367-A4C3486B2D96}" destId="{53FB245B-549F-41A8-85A7-8DC9298ABFD7}" srcOrd="0" destOrd="0" presId="urn:microsoft.com/office/officeart/2024/3/layout/SimpleTimelineDefaultVariant"/>
-    <dgm:cxn modelId="{1393C8DD-1B38-4F27-8013-267A7D40B558}" type="presParOf" srcId="{53FB245B-549F-41A8-85A7-8DC9298ABFD7}" destId="{34DD218C-FBA4-4914-8E86-E286CBBF679B}" srcOrd="0" destOrd="0" presId="urn:microsoft.com/office/officeart/2024/3/layout/SimpleTimelineDefaultVariant"/>
-    <dgm:cxn modelId="{C3B24378-0B97-4156-9EA1-F2655DD720D1}" type="presParOf" srcId="{53FB245B-549F-41A8-85A7-8DC9298ABFD7}" destId="{D7F5E375-D0CA-42FC-835A-31381C5E5D37}" srcOrd="1" destOrd="0" presId="urn:microsoft.com/office/officeart/2024/3/layout/SimpleTimelineDefaultVariant"/>
-    <dgm:cxn modelId="{EFF7C30F-5104-4486-A7B6-78DD04385A72}" type="presParOf" srcId="{D7F5E375-D0CA-42FC-835A-31381C5E5D37}" destId="{90BFAD0B-06DA-4B4F-B83D-5C02B8A89EC4}" srcOrd="0" destOrd="0" presId="urn:microsoft.com/office/officeart/2024/3/layout/SimpleTimelineDefaultVariant"/>
-    <dgm:cxn modelId="{94F321F8-4944-466B-A445-E93FB02BE0F8}" type="presParOf" srcId="{D7F5E375-D0CA-42FC-835A-31381C5E5D37}" destId="{3941855B-9F45-4A82-956B-02684A432AA5}" srcOrd="1" destOrd="0" presId="urn:microsoft.com/office/officeart/2024/3/layout/SimpleTimelineDefaultVariant"/>
-    <dgm:cxn modelId="{0BB81A8B-4E3A-468E-B8E6-324DCD9A8631}" type="presParOf" srcId="{53FB245B-549F-41A8-85A7-8DC9298ABFD7}" destId="{31877334-3A87-4D72-A1B1-F99AFF9D710D}" srcOrd="2" destOrd="0" presId="urn:microsoft.com/office/officeart/2024/3/layout/SimpleTimelineDefaultVariant"/>
-    <dgm:cxn modelId="{6B52CE51-B24C-4D71-9EC5-01808FCD2084}" type="presParOf" srcId="{53FB245B-549F-41A8-85A7-8DC9298ABFD7}" destId="{01E41ACE-E33B-41B9-A714-73522D3F7C76}" srcOrd="3" destOrd="0" presId="urn:microsoft.com/office/officeart/2024/3/layout/SimpleTimelineDefaultVariant"/>
-    <dgm:cxn modelId="{92786818-E059-4D9B-9344-16C2EE86789A}" type="presParOf" srcId="{53FB245B-549F-41A8-85A7-8DC9298ABFD7}" destId="{CEE8CE24-AD73-4777-BAB3-4A5D9CE74308}" srcOrd="4" destOrd="0" presId="urn:microsoft.com/office/officeart/2024/3/layout/SimpleTimelineDefaultVariant"/>
-    <dgm:cxn modelId="{AFE9473A-108E-458F-B450-58FAE819A0BC}" type="presParOf" srcId="{53FB245B-549F-41A8-85A7-8DC9298ABFD7}" destId="{CA0DAB95-CF81-4C72-99EC-F6A08D694850}" srcOrd="5" destOrd="0" presId="urn:microsoft.com/office/officeart/2024/3/layout/SimpleTimelineDefaultVariant"/>
-    <dgm:cxn modelId="{7A9C8646-BE5E-43E8-8A8A-0B8D6550F0F0}" type="presParOf" srcId="{A7AE47DD-8DEC-4B56-9367-A4C3486B2D96}" destId="{5B1444F8-B111-4850-AE5F-D928CB18CD7B}" srcOrd="1" destOrd="0" presId="urn:microsoft.com/office/officeart/2024/3/layout/SimpleTimelineDefaultVariant"/>
-    <dgm:cxn modelId="{CE7084FA-1070-4132-99E6-371B4740A470}" type="presParOf" srcId="{A7AE47DD-8DEC-4B56-9367-A4C3486B2D96}" destId="{3E821FC4-A874-450B-8482-9337AC1C1E0B}" srcOrd="2" destOrd="0" presId="urn:microsoft.com/office/officeart/2024/3/layout/SimpleTimelineDefaultVariant"/>
-    <dgm:cxn modelId="{E10F3C62-526E-4E0E-B125-5B377161F741}" type="presParOf" srcId="{3E821FC4-A874-450B-8482-9337AC1C1E0B}" destId="{0D3203CA-3A44-4E67-9918-35447FA83302}" srcOrd="0" destOrd="0" presId="urn:microsoft.com/office/officeart/2024/3/layout/SimpleTimelineDefaultVariant"/>
-    <dgm:cxn modelId="{F817842A-05E5-49AC-AE76-9DB796B47E7A}" type="presParOf" srcId="{3E821FC4-A874-450B-8482-9337AC1C1E0B}" destId="{167C0091-4211-46CD-8319-88B0084C9D44}" srcOrd="1" destOrd="0" presId="urn:microsoft.com/office/officeart/2024/3/layout/SimpleTimelineDefaultVariant"/>
-    <dgm:cxn modelId="{00A99AB8-03D4-4F56-9AB9-46793762E406}" type="presParOf" srcId="{167C0091-4211-46CD-8319-88B0084C9D44}" destId="{DC0398C9-F266-4E41-85EE-CAB679514169}" srcOrd="0" destOrd="0" presId="urn:microsoft.com/office/officeart/2024/3/layout/SimpleTimelineDefaultVariant"/>
-    <dgm:cxn modelId="{0B18FDC2-8F52-4EFC-BDA8-5C850D4762FC}" type="presParOf" srcId="{167C0091-4211-46CD-8319-88B0084C9D44}" destId="{591D0C9E-F3BD-4ACE-A927-797BE3DA39DF}" srcOrd="1" destOrd="0" presId="urn:microsoft.com/office/officeart/2024/3/layout/SimpleTimelineDefaultVariant"/>
-    <dgm:cxn modelId="{2FF5D9E6-A2DB-44AB-93E8-897B115DED7C}" type="presParOf" srcId="{3E821FC4-A874-450B-8482-9337AC1C1E0B}" destId="{443870C5-2799-47B5-AA6B-A0C45107D3FC}" srcOrd="2" destOrd="0" presId="urn:microsoft.com/office/officeart/2024/3/layout/SimpleTimelineDefaultVariant"/>
-    <dgm:cxn modelId="{700021FA-5BF9-48BD-8AB9-1390B21DFCB4}" type="presParOf" srcId="{3E821FC4-A874-450B-8482-9337AC1C1E0B}" destId="{89EF5014-7ECE-4300-A882-B69FFA73745D}" srcOrd="3" destOrd="0" presId="urn:microsoft.com/office/officeart/2024/3/layout/SimpleTimelineDefaultVariant"/>
-    <dgm:cxn modelId="{78E6E696-05FF-4195-A762-D5F57014F470}" type="presParOf" srcId="{3E821FC4-A874-450B-8482-9337AC1C1E0B}" destId="{7FC7980B-78D1-4A8D-9208-76052E50D81B}" srcOrd="4" destOrd="0" presId="urn:microsoft.com/office/officeart/2024/3/layout/SimpleTimelineDefaultVariant"/>
-    <dgm:cxn modelId="{8C4D5455-8528-4935-81B5-6BCCE31B4B3F}" type="presParOf" srcId="{3E821FC4-A874-450B-8482-9337AC1C1E0B}" destId="{2A9B783C-D24D-49E5-BA81-DDD844BCDDD5}" srcOrd="5" destOrd="0" presId="urn:microsoft.com/office/officeart/2024/3/layout/SimpleTimelineDefaultVariant"/>
-    <dgm:cxn modelId="{96FC1F9B-BE33-4EA5-8579-909C9A48D4A2}" type="presParOf" srcId="{A7AE47DD-8DEC-4B56-9367-A4C3486B2D96}" destId="{0C971922-0DF1-44AF-961F-8011F77D6504}" srcOrd="3" destOrd="0" presId="urn:microsoft.com/office/officeart/2024/3/layout/SimpleTimelineDefaultVariant"/>
-    <dgm:cxn modelId="{4B4D43CC-E36B-4CAF-B861-2F2F1B306215}" type="presParOf" srcId="{A7AE47DD-8DEC-4B56-9367-A4C3486B2D96}" destId="{538F7CB4-9A53-484B-81CA-260A79B4F163}" srcOrd="4" destOrd="0" presId="urn:microsoft.com/office/officeart/2024/3/layout/SimpleTimelineDefaultVariant"/>
-    <dgm:cxn modelId="{82C654E3-4787-4B7D-B03D-0D100CA83A6E}" type="presParOf" srcId="{538F7CB4-9A53-484B-81CA-260A79B4F163}" destId="{682EA88A-A4E4-4AA7-9FB1-B83F193F2C39}" srcOrd="0" destOrd="0" presId="urn:microsoft.com/office/officeart/2024/3/layout/SimpleTimelineDefaultVariant"/>
-    <dgm:cxn modelId="{86658A40-ECCF-4BEB-BD6F-7209BC59FA3A}" type="presParOf" srcId="{538F7CB4-9A53-484B-81CA-260A79B4F163}" destId="{A0323C5B-5787-4ABC-9130-A621889E8E36}" srcOrd="1" destOrd="0" presId="urn:microsoft.com/office/officeart/2024/3/layout/SimpleTimelineDefaultVariant"/>
-    <dgm:cxn modelId="{73B663A8-0201-4F35-AD3C-EE6640114023}" type="presParOf" srcId="{A0323C5B-5787-4ABC-9130-A621889E8E36}" destId="{4E9D8699-570F-428F-B34E-A8AE18B2A17F}" srcOrd="0" destOrd="0" presId="urn:microsoft.com/office/officeart/2024/3/layout/SimpleTimelineDefaultVariant"/>
-    <dgm:cxn modelId="{1719BA1F-9FA5-4CE8-8291-B2C291CA9BE8}" type="presParOf" srcId="{A0323C5B-5787-4ABC-9130-A621889E8E36}" destId="{64CCA8F3-173A-4D74-B9A2-49BDD6D8183A}" srcOrd="1" destOrd="0" presId="urn:microsoft.com/office/officeart/2024/3/layout/SimpleTimelineDefaultVariant"/>
-    <dgm:cxn modelId="{7A8CE64B-5AB6-43DC-9BB1-D43D901AFEF9}" type="presParOf" srcId="{538F7CB4-9A53-484B-81CA-260A79B4F163}" destId="{00D2B9ED-BE51-47B3-B26C-BA45F9641DBB}" srcOrd="2" destOrd="0" presId="urn:microsoft.com/office/officeart/2024/3/layout/SimpleTimelineDefaultVariant"/>
-    <dgm:cxn modelId="{999E1437-653D-4C20-8109-69C8F63F6BB6}" type="presParOf" srcId="{538F7CB4-9A53-484B-81CA-260A79B4F163}" destId="{2664027A-B5AC-41CA-A071-5DF0CF1E8120}" srcOrd="3" destOrd="0" presId="urn:microsoft.com/office/officeart/2024/3/layout/SimpleTimelineDefaultVariant"/>
-    <dgm:cxn modelId="{8398D807-7F65-497B-8F67-E83E422BD0C5}" type="presParOf" srcId="{538F7CB4-9A53-484B-81CA-260A79B4F163}" destId="{6F004247-9FD8-4E6D-9363-DE121E4356A0}" srcOrd="4" destOrd="0" presId="urn:microsoft.com/office/officeart/2024/3/layout/SimpleTimelineDefaultVariant"/>
-    <dgm:cxn modelId="{A6AA1671-8164-49C0-A3FA-63042AF3F06E}" type="presParOf" srcId="{538F7CB4-9A53-484B-81CA-260A79B4F163}" destId="{5A9AD2D3-337B-4134-B8ED-771B806C587F}" srcOrd="5" destOrd="0" presId="urn:microsoft.com/office/officeart/2024/3/layout/SimpleTimelineDefaultVariant"/>
-    <dgm:cxn modelId="{79D168E9-5F98-4BA9-8F19-A6BE31EF2432}" type="presParOf" srcId="{A7AE47DD-8DEC-4B56-9367-A4C3486B2D96}" destId="{A7600265-0C88-4CF8-BE9B-117522065D4D}" srcOrd="5" destOrd="0" presId="urn:microsoft.com/office/officeart/2024/3/layout/SimpleTimelineDefaultVariant"/>
-    <dgm:cxn modelId="{C2A2D83E-F116-41BE-8574-08634AA9595B}" type="presParOf" srcId="{A7AE47DD-8DEC-4B56-9367-A4C3486B2D96}" destId="{2B5389DC-7DD6-4BC8-B779-D6F9230E7016}" srcOrd="6" destOrd="0" presId="urn:microsoft.com/office/officeart/2024/3/layout/SimpleTimelineDefaultVariant"/>
-    <dgm:cxn modelId="{17667FDE-A26B-4DE8-BA8B-117B1B9422CE}" type="presParOf" srcId="{2B5389DC-7DD6-4BC8-B779-D6F9230E7016}" destId="{410FA866-99AD-47B6-AB30-6629B2F7603F}" srcOrd="0" destOrd="0" presId="urn:microsoft.com/office/officeart/2024/3/layout/SimpleTimelineDefaultVariant"/>
-    <dgm:cxn modelId="{BED746F2-666F-4F10-9CC6-41EE29C06D6F}" type="presParOf" srcId="{2B5389DC-7DD6-4BC8-B779-D6F9230E7016}" destId="{62656441-CCB5-4F11-87D3-A71692F13D3F}" srcOrd="1" destOrd="0" presId="urn:microsoft.com/office/officeart/2024/3/layout/SimpleTimelineDefaultVariant"/>
-    <dgm:cxn modelId="{A5AB7727-474A-456A-879E-0F973BD4E553}" type="presParOf" srcId="{62656441-CCB5-4F11-87D3-A71692F13D3F}" destId="{1D54DDC9-D893-4C2D-937E-BD8391046565}" srcOrd="0" destOrd="0" presId="urn:microsoft.com/office/officeart/2024/3/layout/SimpleTimelineDefaultVariant"/>
-    <dgm:cxn modelId="{8E1D78BF-45B4-4D1B-9B93-7E185310FD9C}" type="presParOf" srcId="{62656441-CCB5-4F11-87D3-A71692F13D3F}" destId="{A8F6EDE2-EF0C-457E-BC04-95B7917B5FF1}" srcOrd="1" destOrd="0" presId="urn:microsoft.com/office/officeart/2024/3/layout/SimpleTimelineDefaultVariant"/>
-    <dgm:cxn modelId="{95CAF424-05E5-4664-B342-EF3B5954AA9A}" type="presParOf" srcId="{2B5389DC-7DD6-4BC8-B779-D6F9230E7016}" destId="{229A8B9E-D26E-4B8B-B637-778F404FB5B5}" srcOrd="2" destOrd="0" presId="urn:microsoft.com/office/officeart/2024/3/layout/SimpleTimelineDefaultVariant"/>
-    <dgm:cxn modelId="{AA201145-2A76-4483-B8F0-8392FB98D7EE}" type="presParOf" srcId="{2B5389DC-7DD6-4BC8-B779-D6F9230E7016}" destId="{EE41F65A-AA70-4EE3-81F3-A539EF20984B}" srcOrd="3" destOrd="0" presId="urn:microsoft.com/office/officeart/2024/3/layout/SimpleTimelineDefaultVariant"/>
-    <dgm:cxn modelId="{8B6E80D4-2806-4A69-9E73-41CD39547D73}" type="presParOf" srcId="{2B5389DC-7DD6-4BC8-B779-D6F9230E7016}" destId="{E28909AF-007C-49D7-8958-97FF1699473D}" srcOrd="4" destOrd="0" presId="urn:microsoft.com/office/officeart/2024/3/layout/SimpleTimelineDefaultVariant"/>
-    <dgm:cxn modelId="{FBB39C02-54F7-4D4E-A470-BEB20C8A9800}" type="presParOf" srcId="{2B5389DC-7DD6-4BC8-B779-D6F9230E7016}" destId="{6C0C9696-FE62-48F7-8988-6F70C68CBD83}" srcOrd="5" destOrd="0" presId="urn:microsoft.com/office/officeart/2024/3/layout/SimpleTimelineDefaultVariant"/>
-    <dgm:cxn modelId="{A08FE092-70CE-4BB3-A0AB-00755DD85AD0}" type="presParOf" srcId="{A7AE47DD-8DEC-4B56-9367-A4C3486B2D96}" destId="{F46B52D1-BAB5-4C3E-A7AE-5109068EFB92}" srcOrd="7" destOrd="0" presId="urn:microsoft.com/office/officeart/2024/3/layout/SimpleTimelineDefaultVariant"/>
-    <dgm:cxn modelId="{97101549-6801-447E-886D-7CF546182FB3}" type="presParOf" srcId="{A7AE47DD-8DEC-4B56-9367-A4C3486B2D96}" destId="{A74FF97E-7200-4943-9A5B-13D208BDD317}" srcOrd="8" destOrd="0" presId="urn:microsoft.com/office/officeart/2024/3/layout/SimpleTimelineDefaultVariant"/>
-    <dgm:cxn modelId="{AA2D2BE4-D77B-427C-BF71-8873269A419C}" type="presParOf" srcId="{A74FF97E-7200-4943-9A5B-13D208BDD317}" destId="{D1F0411E-85F0-49A3-90A8-C760162A06F7}" srcOrd="0" destOrd="0" presId="urn:microsoft.com/office/officeart/2024/3/layout/SimpleTimelineDefaultVariant"/>
-    <dgm:cxn modelId="{3CF0F203-BF75-477B-8BD3-B7117933E55F}" type="presParOf" srcId="{A74FF97E-7200-4943-9A5B-13D208BDD317}" destId="{F77DF66D-9675-47A7-ADD4-F35123143610}" srcOrd="1" destOrd="0" presId="urn:microsoft.com/office/officeart/2024/3/layout/SimpleTimelineDefaultVariant"/>
-    <dgm:cxn modelId="{E2F229F5-8DDE-47E7-9E2D-A83E28D3D789}" type="presParOf" srcId="{F77DF66D-9675-47A7-ADD4-F35123143610}" destId="{061DA4A7-7DD3-47A6-8F75-591FD3C5F66E}" srcOrd="0" destOrd="0" presId="urn:microsoft.com/office/officeart/2024/3/layout/SimpleTimelineDefaultVariant"/>
-    <dgm:cxn modelId="{0610733D-FFD9-4BAD-9058-18D4C2B10EB8}" type="presParOf" srcId="{F77DF66D-9675-47A7-ADD4-F35123143610}" destId="{0E07606D-90D6-4C46-9C6F-D1FA7A46AD31}" srcOrd="1" destOrd="0" presId="urn:microsoft.com/office/officeart/2024/3/layout/SimpleTimelineDefaultVariant"/>
-    <dgm:cxn modelId="{68012CD5-FFB0-4E79-91B3-742044FAE392}" type="presParOf" srcId="{A74FF97E-7200-4943-9A5B-13D208BDD317}" destId="{A8C61B89-04C1-40B8-A753-92BDABE39300}" srcOrd="2" destOrd="0" presId="urn:microsoft.com/office/officeart/2024/3/layout/SimpleTimelineDefaultVariant"/>
-    <dgm:cxn modelId="{5F839379-FB72-42A4-8D77-146CB4249C83}" type="presParOf" srcId="{A74FF97E-7200-4943-9A5B-13D208BDD317}" destId="{F7F215AA-1548-4946-9818-24CE434B0257}" srcOrd="3" destOrd="0" presId="urn:microsoft.com/office/officeart/2024/3/layout/SimpleTimelineDefaultVariant"/>
-    <dgm:cxn modelId="{AFAF142D-9407-418F-BDC6-7BB2FA179012}" type="presParOf" srcId="{A74FF97E-7200-4943-9A5B-13D208BDD317}" destId="{A657FCB3-50B0-4F61-A00C-56D9B387AFBF}" srcOrd="4" destOrd="0" presId="urn:microsoft.com/office/officeart/2024/3/layout/SimpleTimelineDefaultVariant"/>
-    <dgm:cxn modelId="{8D521E88-E417-4880-A7C9-5690784FD0A8}" type="presParOf" srcId="{A74FF97E-7200-4943-9A5B-13D208BDD317}" destId="{7D6140CA-EF57-4603-ADAF-5E5FB81F7207}" srcOrd="5" destOrd="0" presId="urn:microsoft.com/office/officeart/2024/3/layout/SimpleTimelineDefaultVariant"/>
+    <dgm:cxn modelId="{702E9108-5C84-40EE-A85A-56321363D8FE}" type="presParOf" srcId="{9AE89FB1-F474-491F-AB27-A0F134775DF5}" destId="{B7BF8D1E-0607-4B5F-981C-154E326D1064}" srcOrd="0" destOrd="0" presId="urn:microsoft.com/office/officeart/2024/3/layout/SimpleTimelineDefaultVariant"/>
+    <dgm:cxn modelId="{6603D8F0-238E-42C2-9F2F-8A3359B74300}" type="presParOf" srcId="{9AE89FB1-F474-491F-AB27-A0F134775DF5}" destId="{A7AE47DD-8DEC-4B56-9367-A4C3486B2D96}" srcOrd="1" destOrd="0" presId="urn:microsoft.com/office/officeart/2024/3/layout/SimpleTimelineDefaultVariant"/>
+    <dgm:cxn modelId="{98C30F43-5CDA-448B-A28E-4E30C30A63C6}" type="presParOf" srcId="{A7AE47DD-8DEC-4B56-9367-A4C3486B2D96}" destId="{53FB245B-549F-41A8-85A7-8DC9298ABFD7}" srcOrd="0" destOrd="0" presId="urn:microsoft.com/office/officeart/2024/3/layout/SimpleTimelineDefaultVariant"/>
+    <dgm:cxn modelId="{A7A8C73B-651D-4BFB-9A35-92B5D4FFAAF8}" type="presParOf" srcId="{53FB245B-549F-41A8-85A7-8DC9298ABFD7}" destId="{34DD218C-FBA4-4914-8E86-E286CBBF679B}" srcOrd="0" destOrd="0" presId="urn:microsoft.com/office/officeart/2024/3/layout/SimpleTimelineDefaultVariant"/>
+    <dgm:cxn modelId="{695133FB-802F-43EA-8C7E-1FD69A536E9F}" type="presParOf" srcId="{53FB245B-549F-41A8-85A7-8DC9298ABFD7}" destId="{D7F5E375-D0CA-42FC-835A-31381C5E5D37}" srcOrd="1" destOrd="0" presId="urn:microsoft.com/office/officeart/2024/3/layout/SimpleTimelineDefaultVariant"/>
+    <dgm:cxn modelId="{01FA2801-095E-4BE0-BFFF-78D14B22B7A4}" type="presParOf" srcId="{D7F5E375-D0CA-42FC-835A-31381C5E5D37}" destId="{90BFAD0B-06DA-4B4F-B83D-5C02B8A89EC4}" srcOrd="0" destOrd="0" presId="urn:microsoft.com/office/officeart/2024/3/layout/SimpleTimelineDefaultVariant"/>
+    <dgm:cxn modelId="{93155580-9733-4255-AA4A-8703EDE39B9D}" type="presParOf" srcId="{D7F5E375-D0CA-42FC-835A-31381C5E5D37}" destId="{3941855B-9F45-4A82-956B-02684A432AA5}" srcOrd="1" destOrd="0" presId="urn:microsoft.com/office/officeart/2024/3/layout/SimpleTimelineDefaultVariant"/>
+    <dgm:cxn modelId="{86CF30E3-AEFF-4BAF-AF90-D6A7BD7A73D3}" type="presParOf" srcId="{53FB245B-549F-41A8-85A7-8DC9298ABFD7}" destId="{31877334-3A87-4D72-A1B1-F99AFF9D710D}" srcOrd="2" destOrd="0" presId="urn:microsoft.com/office/officeart/2024/3/layout/SimpleTimelineDefaultVariant"/>
+    <dgm:cxn modelId="{1616A39A-6C2B-4C63-AF1B-026369EF54BD}" type="presParOf" srcId="{53FB245B-549F-41A8-85A7-8DC9298ABFD7}" destId="{01E41ACE-E33B-41B9-A714-73522D3F7C76}" srcOrd="3" destOrd="0" presId="urn:microsoft.com/office/officeart/2024/3/layout/SimpleTimelineDefaultVariant"/>
+    <dgm:cxn modelId="{A5142B5D-26E4-4B08-A48C-14DAE7EBDC67}" type="presParOf" srcId="{53FB245B-549F-41A8-85A7-8DC9298ABFD7}" destId="{CEE8CE24-AD73-4777-BAB3-4A5D9CE74308}" srcOrd="4" destOrd="0" presId="urn:microsoft.com/office/officeart/2024/3/layout/SimpleTimelineDefaultVariant"/>
+    <dgm:cxn modelId="{E5BBBEEE-0E5E-4FA5-821D-8833B5EEAD6F}" type="presParOf" srcId="{53FB245B-549F-41A8-85A7-8DC9298ABFD7}" destId="{CA0DAB95-CF81-4C72-99EC-F6A08D694850}" srcOrd="5" destOrd="0" presId="urn:microsoft.com/office/officeart/2024/3/layout/SimpleTimelineDefaultVariant"/>
+    <dgm:cxn modelId="{AA82E0E0-CE8D-4B2D-ACE5-A0DD70323368}" type="presParOf" srcId="{A7AE47DD-8DEC-4B56-9367-A4C3486B2D96}" destId="{5B1444F8-B111-4850-AE5F-D928CB18CD7B}" srcOrd="1" destOrd="0" presId="urn:microsoft.com/office/officeart/2024/3/layout/SimpleTimelineDefaultVariant"/>
+    <dgm:cxn modelId="{57A255AA-BCED-4A78-BE4A-6A54FD2B0E26}" type="presParOf" srcId="{A7AE47DD-8DEC-4B56-9367-A4C3486B2D96}" destId="{3E821FC4-A874-450B-8482-9337AC1C1E0B}" srcOrd="2" destOrd="0" presId="urn:microsoft.com/office/officeart/2024/3/layout/SimpleTimelineDefaultVariant"/>
+    <dgm:cxn modelId="{545F0C6A-EAB1-4A6F-BACD-81123C51928A}" type="presParOf" srcId="{3E821FC4-A874-450B-8482-9337AC1C1E0B}" destId="{0D3203CA-3A44-4E67-9918-35447FA83302}" srcOrd="0" destOrd="0" presId="urn:microsoft.com/office/officeart/2024/3/layout/SimpleTimelineDefaultVariant"/>
+    <dgm:cxn modelId="{0B99AE60-5143-4596-BFFB-43443F03FD9C}" type="presParOf" srcId="{3E821FC4-A874-450B-8482-9337AC1C1E0B}" destId="{167C0091-4211-46CD-8319-88B0084C9D44}" srcOrd="1" destOrd="0" presId="urn:microsoft.com/office/officeart/2024/3/layout/SimpleTimelineDefaultVariant"/>
+    <dgm:cxn modelId="{07142C9B-A34A-4622-94A9-958FDD59A149}" type="presParOf" srcId="{167C0091-4211-46CD-8319-88B0084C9D44}" destId="{DC0398C9-F266-4E41-85EE-CAB679514169}" srcOrd="0" destOrd="0" presId="urn:microsoft.com/office/officeart/2024/3/layout/SimpleTimelineDefaultVariant"/>
+    <dgm:cxn modelId="{28205132-2288-47B9-ACA4-4B8F97E6E0CE}" type="presParOf" srcId="{167C0091-4211-46CD-8319-88B0084C9D44}" destId="{591D0C9E-F3BD-4ACE-A927-797BE3DA39DF}" srcOrd="1" destOrd="0" presId="urn:microsoft.com/office/officeart/2024/3/layout/SimpleTimelineDefaultVariant"/>
+    <dgm:cxn modelId="{CCDCF399-C601-47E6-9D63-1C5FE49401A8}" type="presParOf" srcId="{3E821FC4-A874-450B-8482-9337AC1C1E0B}" destId="{443870C5-2799-47B5-AA6B-A0C45107D3FC}" srcOrd="2" destOrd="0" presId="urn:microsoft.com/office/officeart/2024/3/layout/SimpleTimelineDefaultVariant"/>
+    <dgm:cxn modelId="{96E4AD3E-7C28-43FB-8F59-F24192875E61}" type="presParOf" srcId="{3E821FC4-A874-450B-8482-9337AC1C1E0B}" destId="{89EF5014-7ECE-4300-A882-B69FFA73745D}" srcOrd="3" destOrd="0" presId="urn:microsoft.com/office/officeart/2024/3/layout/SimpleTimelineDefaultVariant"/>
+    <dgm:cxn modelId="{DE8005B8-1C83-4619-9E66-9C292053B541}" type="presParOf" srcId="{3E821FC4-A874-450B-8482-9337AC1C1E0B}" destId="{7FC7980B-78D1-4A8D-9208-76052E50D81B}" srcOrd="4" destOrd="0" presId="urn:microsoft.com/office/officeart/2024/3/layout/SimpleTimelineDefaultVariant"/>
+    <dgm:cxn modelId="{9D064252-A15B-46A1-A54F-D601866939F9}" type="presParOf" srcId="{3E821FC4-A874-450B-8482-9337AC1C1E0B}" destId="{2A9B783C-D24D-49E5-BA81-DDD844BCDDD5}" srcOrd="5" destOrd="0" presId="urn:microsoft.com/office/officeart/2024/3/layout/SimpleTimelineDefaultVariant"/>
+    <dgm:cxn modelId="{6F7BA324-AC8A-4916-98DB-30B01C4FCA72}" type="presParOf" srcId="{A7AE47DD-8DEC-4B56-9367-A4C3486B2D96}" destId="{0C971922-0DF1-44AF-961F-8011F77D6504}" srcOrd="3" destOrd="0" presId="urn:microsoft.com/office/officeart/2024/3/layout/SimpleTimelineDefaultVariant"/>
+    <dgm:cxn modelId="{FF349671-3C67-40EC-8B13-5B526AE69FC6}" type="presParOf" srcId="{A7AE47DD-8DEC-4B56-9367-A4C3486B2D96}" destId="{CF50A41E-3DDD-40CD-ACA2-EAAFB95D23C9}" srcOrd="4" destOrd="0" presId="urn:microsoft.com/office/officeart/2024/3/layout/SimpleTimelineDefaultVariant"/>
+    <dgm:cxn modelId="{150AF094-AC2B-4456-A9AB-04EB08B2C184}" type="presParOf" srcId="{CF50A41E-3DDD-40CD-ACA2-EAAFB95D23C9}" destId="{AF74090F-5DD0-421A-8442-5D7C388EC70E}" srcOrd="0" destOrd="0" presId="urn:microsoft.com/office/officeart/2024/3/layout/SimpleTimelineDefaultVariant"/>
+    <dgm:cxn modelId="{AD3A56D0-3DAD-453B-AED8-80023C7F439E}" type="presParOf" srcId="{CF50A41E-3DDD-40CD-ACA2-EAAFB95D23C9}" destId="{8A4FA058-ED32-496A-9F26-032899AA124E}" srcOrd="1" destOrd="0" presId="urn:microsoft.com/office/officeart/2024/3/layout/SimpleTimelineDefaultVariant"/>
+    <dgm:cxn modelId="{429F1CB5-0826-45CB-878F-79070EAEA7AE}" type="presParOf" srcId="{8A4FA058-ED32-496A-9F26-032899AA124E}" destId="{6929D9D2-0A51-432F-871D-51370325AA3D}" srcOrd="0" destOrd="0" presId="urn:microsoft.com/office/officeart/2024/3/layout/SimpleTimelineDefaultVariant"/>
+    <dgm:cxn modelId="{DDB0A9A5-E17B-4B73-B592-0B5198CB0207}" type="presParOf" srcId="{8A4FA058-ED32-496A-9F26-032899AA124E}" destId="{316AFCE1-05D5-4FBF-9DD0-66F6FC68FE60}" srcOrd="1" destOrd="0" presId="urn:microsoft.com/office/officeart/2024/3/layout/SimpleTimelineDefaultVariant"/>
+    <dgm:cxn modelId="{C5759E97-EC9B-410E-ADCD-8BCE56AF5E77}" type="presParOf" srcId="{CF50A41E-3DDD-40CD-ACA2-EAAFB95D23C9}" destId="{4EFA55F0-9851-4A7D-B4C2-406FA2DDC290}" srcOrd="2" destOrd="0" presId="urn:microsoft.com/office/officeart/2024/3/layout/SimpleTimelineDefaultVariant"/>
+    <dgm:cxn modelId="{AB148C13-A860-49B1-9A03-7D6B8BA3EBC7}" type="presParOf" srcId="{CF50A41E-3DDD-40CD-ACA2-EAAFB95D23C9}" destId="{8ED051A1-811D-4C38-B101-1F9FB6E68C2F}" srcOrd="3" destOrd="0" presId="urn:microsoft.com/office/officeart/2024/3/layout/SimpleTimelineDefaultVariant"/>
+    <dgm:cxn modelId="{002F3EC7-38F0-45E5-A5E9-3295BDA6C97F}" type="presParOf" srcId="{CF50A41E-3DDD-40CD-ACA2-EAAFB95D23C9}" destId="{39358395-8FDB-4859-B0D5-418F40A118A6}" srcOrd="4" destOrd="0" presId="urn:microsoft.com/office/officeart/2024/3/layout/SimpleTimelineDefaultVariant"/>
+    <dgm:cxn modelId="{8CE7C5A8-2813-46F4-8A33-7432127E9A44}" type="presParOf" srcId="{CF50A41E-3DDD-40CD-ACA2-EAAFB95D23C9}" destId="{F896B363-D757-4D61-BDC4-7B4D48E4E062}" srcOrd="5" destOrd="0" presId="urn:microsoft.com/office/officeart/2024/3/layout/SimpleTimelineDefaultVariant"/>
+    <dgm:cxn modelId="{690E0CED-13BC-4FAA-89B2-11FACB3EEEF5}" type="presParOf" srcId="{A7AE47DD-8DEC-4B56-9367-A4C3486B2D96}" destId="{C0C43931-B00D-4A56-A5A6-80A44EF83806}" srcOrd="5" destOrd="0" presId="urn:microsoft.com/office/officeart/2024/3/layout/SimpleTimelineDefaultVariant"/>
+    <dgm:cxn modelId="{C3689AAA-CA63-47D7-92B4-E0E68A94B873}" type="presParOf" srcId="{A7AE47DD-8DEC-4B56-9367-A4C3486B2D96}" destId="{538F7CB4-9A53-484B-81CA-260A79B4F163}" srcOrd="6" destOrd="0" presId="urn:microsoft.com/office/officeart/2024/3/layout/SimpleTimelineDefaultVariant"/>
+    <dgm:cxn modelId="{11EBCAC0-FE8C-4C98-8D04-AEAA3780D8A6}" type="presParOf" srcId="{538F7CB4-9A53-484B-81CA-260A79B4F163}" destId="{682EA88A-A4E4-4AA7-9FB1-B83F193F2C39}" srcOrd="0" destOrd="0" presId="urn:microsoft.com/office/officeart/2024/3/layout/SimpleTimelineDefaultVariant"/>
+    <dgm:cxn modelId="{49FE097F-35F8-431B-BEA4-A580890766D1}" type="presParOf" srcId="{538F7CB4-9A53-484B-81CA-260A79B4F163}" destId="{A0323C5B-5787-4ABC-9130-A621889E8E36}" srcOrd="1" destOrd="0" presId="urn:microsoft.com/office/officeart/2024/3/layout/SimpleTimelineDefaultVariant"/>
+    <dgm:cxn modelId="{F0E92F8F-700C-437F-8DE0-28C8153E8742}" type="presParOf" srcId="{A0323C5B-5787-4ABC-9130-A621889E8E36}" destId="{4E9D8699-570F-428F-B34E-A8AE18B2A17F}" srcOrd="0" destOrd="0" presId="urn:microsoft.com/office/officeart/2024/3/layout/SimpleTimelineDefaultVariant"/>
+    <dgm:cxn modelId="{C968B006-2CB7-4101-A2AF-07BC2CAC95F5}" type="presParOf" srcId="{A0323C5B-5787-4ABC-9130-A621889E8E36}" destId="{64CCA8F3-173A-4D74-B9A2-49BDD6D8183A}" srcOrd="1" destOrd="0" presId="urn:microsoft.com/office/officeart/2024/3/layout/SimpleTimelineDefaultVariant"/>
+    <dgm:cxn modelId="{B92931C6-27B4-4C8B-8F6F-5EA290664D62}" type="presParOf" srcId="{538F7CB4-9A53-484B-81CA-260A79B4F163}" destId="{00D2B9ED-BE51-47B3-B26C-BA45F9641DBB}" srcOrd="2" destOrd="0" presId="urn:microsoft.com/office/officeart/2024/3/layout/SimpleTimelineDefaultVariant"/>
+    <dgm:cxn modelId="{D3CF2B22-043C-40CB-AB44-D07F5572D2C0}" type="presParOf" srcId="{538F7CB4-9A53-484B-81CA-260A79B4F163}" destId="{2664027A-B5AC-41CA-A071-5DF0CF1E8120}" srcOrd="3" destOrd="0" presId="urn:microsoft.com/office/officeart/2024/3/layout/SimpleTimelineDefaultVariant"/>
+    <dgm:cxn modelId="{9A88161D-87B5-44DE-B837-7041AF1D9695}" type="presParOf" srcId="{538F7CB4-9A53-484B-81CA-260A79B4F163}" destId="{6F004247-9FD8-4E6D-9363-DE121E4356A0}" srcOrd="4" destOrd="0" presId="urn:microsoft.com/office/officeart/2024/3/layout/SimpleTimelineDefaultVariant"/>
+    <dgm:cxn modelId="{DA827407-DC5D-420D-B0AC-CA20A2BA8493}" type="presParOf" srcId="{538F7CB4-9A53-484B-81CA-260A79B4F163}" destId="{5A9AD2D3-337B-4134-B8ED-771B806C587F}" srcOrd="5" destOrd="0" presId="urn:microsoft.com/office/officeart/2024/3/layout/SimpleTimelineDefaultVariant"/>
+    <dgm:cxn modelId="{EA363CCE-3B82-48D3-BF5C-25AC3C8EBB7C}" type="presParOf" srcId="{A7AE47DD-8DEC-4B56-9367-A4C3486B2D96}" destId="{A7600265-0C88-4CF8-BE9B-117522065D4D}" srcOrd="7" destOrd="0" presId="urn:microsoft.com/office/officeart/2024/3/layout/SimpleTimelineDefaultVariant"/>
+    <dgm:cxn modelId="{A904C8D0-5EDF-48AE-9D4A-6B8186A1D943}" type="presParOf" srcId="{A7AE47DD-8DEC-4B56-9367-A4C3486B2D96}" destId="{2B5389DC-7DD6-4BC8-B779-D6F9230E7016}" srcOrd="8" destOrd="0" presId="urn:microsoft.com/office/officeart/2024/3/layout/SimpleTimelineDefaultVariant"/>
+    <dgm:cxn modelId="{49B175BA-442A-4C7A-A55F-07B3E15D1469}" type="presParOf" srcId="{2B5389DC-7DD6-4BC8-B779-D6F9230E7016}" destId="{410FA866-99AD-47B6-AB30-6629B2F7603F}" srcOrd="0" destOrd="0" presId="urn:microsoft.com/office/officeart/2024/3/layout/SimpleTimelineDefaultVariant"/>
+    <dgm:cxn modelId="{E0D08C7E-D358-4FC7-8A8C-8F6B0E4F0E04}" type="presParOf" srcId="{2B5389DC-7DD6-4BC8-B779-D6F9230E7016}" destId="{62656441-CCB5-4F11-87D3-A71692F13D3F}" srcOrd="1" destOrd="0" presId="urn:microsoft.com/office/officeart/2024/3/layout/SimpleTimelineDefaultVariant"/>
+    <dgm:cxn modelId="{8DF1A7A8-5518-4FBF-8953-A8A38E89565A}" type="presParOf" srcId="{62656441-CCB5-4F11-87D3-A71692F13D3F}" destId="{1D54DDC9-D893-4C2D-937E-BD8391046565}" srcOrd="0" destOrd="0" presId="urn:microsoft.com/office/officeart/2024/3/layout/SimpleTimelineDefaultVariant"/>
+    <dgm:cxn modelId="{1A83FED9-8577-4135-99D6-84CF98FA9B14}" type="presParOf" srcId="{62656441-CCB5-4F11-87D3-A71692F13D3F}" destId="{A8F6EDE2-EF0C-457E-BC04-95B7917B5FF1}" srcOrd="1" destOrd="0" presId="urn:microsoft.com/office/officeart/2024/3/layout/SimpleTimelineDefaultVariant"/>
+    <dgm:cxn modelId="{E133F2B0-C422-49AB-AC46-2C340DB4CB0E}" type="presParOf" srcId="{2B5389DC-7DD6-4BC8-B779-D6F9230E7016}" destId="{229A8B9E-D26E-4B8B-B637-778F404FB5B5}" srcOrd="2" destOrd="0" presId="urn:microsoft.com/office/officeart/2024/3/layout/SimpleTimelineDefaultVariant"/>
+    <dgm:cxn modelId="{68070A7A-B0E8-4ACE-BF6C-87700C17DF33}" type="presParOf" srcId="{2B5389DC-7DD6-4BC8-B779-D6F9230E7016}" destId="{EE41F65A-AA70-4EE3-81F3-A539EF20984B}" srcOrd="3" destOrd="0" presId="urn:microsoft.com/office/officeart/2024/3/layout/SimpleTimelineDefaultVariant"/>
+    <dgm:cxn modelId="{0BC7FC4C-E0A3-4855-82D2-F6396BB0A23F}" type="presParOf" srcId="{2B5389DC-7DD6-4BC8-B779-D6F9230E7016}" destId="{E28909AF-007C-49D7-8958-97FF1699473D}" srcOrd="4" destOrd="0" presId="urn:microsoft.com/office/officeart/2024/3/layout/SimpleTimelineDefaultVariant"/>
+    <dgm:cxn modelId="{A8E4F875-47A1-484D-8171-69E577E8E778}" type="presParOf" srcId="{2B5389DC-7DD6-4BC8-B779-D6F9230E7016}" destId="{6C0C9696-FE62-48F7-8988-6F70C68CBD83}" srcOrd="5" destOrd="0" presId="urn:microsoft.com/office/officeart/2024/3/layout/SimpleTimelineDefaultVariant"/>
+    <dgm:cxn modelId="{0AEF5494-A52A-4FB9-9EB3-5B0EACB0EDF0}" type="presParOf" srcId="{A7AE47DD-8DEC-4B56-9367-A4C3486B2D96}" destId="{F46B52D1-BAB5-4C3E-A7AE-5109068EFB92}" srcOrd="9" destOrd="0" presId="urn:microsoft.com/office/officeart/2024/3/layout/SimpleTimelineDefaultVariant"/>
+    <dgm:cxn modelId="{C40C1293-F20E-4231-8914-AD55219ACD21}" type="presParOf" srcId="{A7AE47DD-8DEC-4B56-9367-A4C3486B2D96}" destId="{A74FF97E-7200-4943-9A5B-13D208BDD317}" srcOrd="10" destOrd="0" presId="urn:microsoft.com/office/officeart/2024/3/layout/SimpleTimelineDefaultVariant"/>
+    <dgm:cxn modelId="{578B91DF-504C-48F6-87A2-2CBD3D1676E7}" type="presParOf" srcId="{A74FF97E-7200-4943-9A5B-13D208BDD317}" destId="{D1F0411E-85F0-49A3-90A8-C760162A06F7}" srcOrd="0" destOrd="0" presId="urn:microsoft.com/office/officeart/2024/3/layout/SimpleTimelineDefaultVariant"/>
+    <dgm:cxn modelId="{A3A438C7-F189-47C6-BAE7-CCA0032C4DB8}" type="presParOf" srcId="{A74FF97E-7200-4943-9A5B-13D208BDD317}" destId="{F77DF66D-9675-47A7-ADD4-F35123143610}" srcOrd="1" destOrd="0" presId="urn:microsoft.com/office/officeart/2024/3/layout/SimpleTimelineDefaultVariant"/>
+    <dgm:cxn modelId="{2F6B8855-B63E-47BA-AC15-892CAF3E504F}" type="presParOf" srcId="{F77DF66D-9675-47A7-ADD4-F35123143610}" destId="{061DA4A7-7DD3-47A6-8F75-591FD3C5F66E}" srcOrd="0" destOrd="0" presId="urn:microsoft.com/office/officeart/2024/3/layout/SimpleTimelineDefaultVariant"/>
+    <dgm:cxn modelId="{E8BBC1D7-0830-4AF3-8229-2D7098CE5D8B}" type="presParOf" srcId="{F77DF66D-9675-47A7-ADD4-F35123143610}" destId="{0E07606D-90D6-4C46-9C6F-D1FA7A46AD31}" srcOrd="1" destOrd="0" presId="urn:microsoft.com/office/officeart/2024/3/layout/SimpleTimelineDefaultVariant"/>
+    <dgm:cxn modelId="{DBC2FCF9-6533-4118-A7A9-33175B99F7BE}" type="presParOf" srcId="{A74FF97E-7200-4943-9A5B-13D208BDD317}" destId="{A8C61B89-04C1-40B8-A753-92BDABE39300}" srcOrd="2" destOrd="0" presId="urn:microsoft.com/office/officeart/2024/3/layout/SimpleTimelineDefaultVariant"/>
+    <dgm:cxn modelId="{943D7483-972A-472F-8128-27147077F87E}" type="presParOf" srcId="{A74FF97E-7200-4943-9A5B-13D208BDD317}" destId="{F7F215AA-1548-4946-9818-24CE434B0257}" srcOrd="3" destOrd="0" presId="urn:microsoft.com/office/officeart/2024/3/layout/SimpleTimelineDefaultVariant"/>
+    <dgm:cxn modelId="{28BB0680-0389-449C-AF83-3D56D695320B}" type="presParOf" srcId="{A74FF97E-7200-4943-9A5B-13D208BDD317}" destId="{A657FCB3-50B0-4F61-A00C-56D9B387AFBF}" srcOrd="4" destOrd="0" presId="urn:microsoft.com/office/officeart/2024/3/layout/SimpleTimelineDefaultVariant"/>
+    <dgm:cxn modelId="{F5A7EB7C-E044-4448-AB29-1F1863643A1B}" type="presParOf" srcId="{A74FF97E-7200-4943-9A5B-13D208BDD317}" destId="{7D6140CA-EF57-4603-ADAF-5E5FB81F7207}" srcOrd="5" destOrd="0" presId="urn:microsoft.com/office/officeart/2024/3/layout/SimpleTimelineDefaultVariant"/>
   </dgm:cxnLst>
   <dgm:bg/>
   <dgm:whole/>
@@ -2931,8 +3110,8 @@
       </dsp:nvSpPr>
       <dsp:spPr>
         <a:xfrm>
-          <a:off x="423190" y="829551"/>
-          <a:ext cx="2868289" cy="1203663"/>
+          <a:off x="430609" y="829551"/>
+          <a:ext cx="2455555" cy="1203663"/>
         </a:xfrm>
         <a:prstGeom prst="rect">
           <a:avLst/>
@@ -2981,8 +3160,8 @@
         </a:p>
       </dsp:txBody>
       <dsp:txXfrm>
-        <a:off x="423190" y="829551"/>
-        <a:ext cx="2868289" cy="1203663"/>
+        <a:off x="430609" y="829551"/>
+        <a:ext cx="2455555" cy="1203663"/>
       </dsp:txXfrm>
     </dsp:sp>
     <dsp:sp modelId="{01E41ACE-E33B-41B9-A714-73522D3F7C76}">
@@ -2992,8 +3171,8 @@
       </dsp:nvSpPr>
       <dsp:spPr>
         <a:xfrm>
-          <a:off x="423190" y="406643"/>
-          <a:ext cx="2868289" cy="422908"/>
+          <a:off x="430609" y="406643"/>
+          <a:ext cx="2455555" cy="422908"/>
         </a:xfrm>
         <a:prstGeom prst="rect">
           <a:avLst/>
@@ -3062,8 +3241,8 @@
         </a:p>
       </dsp:txBody>
       <dsp:txXfrm>
-        <a:off x="423190" y="406643"/>
-        <a:ext cx="2868289" cy="422908"/>
+        <a:off x="430609" y="406643"/>
+        <a:ext cx="2455555" cy="422908"/>
       </dsp:txXfrm>
     </dsp:sp>
     <dsp:sp modelId="{CEE8CE24-AD73-4777-BAB3-4A5D9CE74308}">
@@ -3073,7 +3252,7 @@
       </dsp:nvSpPr>
       <dsp:spPr>
         <a:xfrm>
-          <a:off x="211736" y="406643"/>
+          <a:off x="219155" y="406643"/>
           <a:ext cx="0" cy="1626572"/>
         </a:xfrm>
         <a:prstGeom prst="line">
@@ -3114,7 +3293,7 @@
       </dsp:nvSpPr>
       <dsp:spPr>
         <a:xfrm>
-          <a:off x="162111" y="1984580"/>
+          <a:off x="170520" y="1984580"/>
           <a:ext cx="97269" cy="97269"/>
         </a:xfrm>
         <a:prstGeom prst="ellipse">
@@ -3164,8 +3343,8 @@
       </dsp:nvSpPr>
       <dsp:spPr>
         <a:xfrm>
-          <a:off x="2142944" y="3009158"/>
-          <a:ext cx="2868289" cy="650628"/>
+          <a:off x="1902899" y="3009158"/>
+          <a:ext cx="2455555" cy="650628"/>
         </a:xfrm>
         <a:prstGeom prst="rect">
           <a:avLst/>
@@ -3207,14 +3386,15 @@
             <a:buNone/>
           </a:pPr>
           <a:r>
-            <a:rPr lang="es-CO" sz="1500" kern="1200" dirty="0"/>
-            <a:t>JOIN puede “explotar”</a:t>
+            <a:rPr lang="es-CO" sz="1500" kern="1200"/>
+            <a:t>Bases de SQL</a:t>
           </a:r>
+          <a:endParaRPr lang="es-CO" sz="1500" kern="1200" dirty="0"/>
         </a:p>
       </dsp:txBody>
       <dsp:txXfrm>
-        <a:off x="2142944" y="3009158"/>
-        <a:ext cx="2868289" cy="650628"/>
+        <a:off x="1902899" y="3009158"/>
+        <a:ext cx="2455555" cy="650628"/>
       </dsp:txXfrm>
     </dsp:sp>
     <dsp:sp modelId="{89EF5014-7ECE-4300-A882-B69FFA73745D}">
@@ -3224,8 +3404,8 @@
       </dsp:nvSpPr>
       <dsp:spPr>
         <a:xfrm>
-          <a:off x="2142944" y="2602515"/>
-          <a:ext cx="2868289" cy="406643"/>
+          <a:off x="1902899" y="2602515"/>
+          <a:ext cx="2455555" cy="406643"/>
         </a:xfrm>
         <a:prstGeom prst="rect">
           <a:avLst/>
@@ -3294,8 +3474,8 @@
         </a:p>
       </dsp:txBody>
       <dsp:txXfrm>
-        <a:off x="2142944" y="2602515"/>
-        <a:ext cx="2868289" cy="406643"/>
+        <a:off x="1902899" y="2602515"/>
+        <a:ext cx="2455555" cy="406643"/>
       </dsp:txXfrm>
     </dsp:sp>
     <dsp:sp modelId="{7FC7980B-78D1-4A8D-9208-76052E50D81B}">
@@ -3305,7 +3485,7 @@
       </dsp:nvSpPr>
       <dsp:spPr>
         <a:xfrm>
-          <a:off x="1931490" y="2033215"/>
+          <a:off x="1691444" y="2033215"/>
           <a:ext cx="0" cy="1626572"/>
         </a:xfrm>
         <a:prstGeom prst="line">
@@ -3346,7 +3526,7 @@
       </dsp:nvSpPr>
       <dsp:spPr>
         <a:xfrm>
-          <a:off x="1881865" y="1984580"/>
+          <a:off x="1642810" y="1984580"/>
           <a:ext cx="97269" cy="97269"/>
         </a:xfrm>
         <a:prstGeom prst="ellipse">
@@ -3389,15 +3569,15 @@
         </a:fontRef>
       </dsp:style>
     </dsp:sp>
-    <dsp:sp modelId="{00D2B9ED-BE51-47B3-B26C-BA45F9641DBB}">
+    <dsp:sp modelId="{4EFA55F0-9851-4A7D-B4C2-406FA2DDC290}">
       <dsp:nvSpPr>
         <dsp:cNvPr id="0" name=""/>
         <dsp:cNvSpPr/>
       </dsp:nvSpPr>
       <dsp:spPr>
         <a:xfrm>
-          <a:off x="3862698" y="829551"/>
-          <a:ext cx="2868289" cy="1203663"/>
+          <a:off x="3375188" y="829551"/>
+          <a:ext cx="2455555" cy="1203663"/>
         </a:xfrm>
         <a:prstGeom prst="rect">
           <a:avLst/>
@@ -3439,55 +3619,25 @@
             <a:buNone/>
           </a:pPr>
           <a:r>
-            <a:rPr lang="es-CO" sz="1500" kern="1200" dirty="0" err="1"/>
-            <a:t>checks</a:t>
-          </a:r>
-          <a:r>
             <a:rPr lang="es-CO" sz="1500" kern="1200" dirty="0"/>
-            <a:t> + contrato</a:t>
-          </a:r>
-        </a:p>
-        <a:p>
-          <a:pPr marL="0" lvl="0" indent="0" algn="l" defTabSz="666750">
-            <a:lnSpc>
-              <a:spcPct val="90000"/>
-            </a:lnSpc>
-            <a:spcBef>
-              <a:spcPct val="0"/>
-            </a:spcBef>
-            <a:spcAft>
-              <a:spcPct val="35000"/>
-            </a:spcAft>
-            <a:buNone/>
-          </a:pPr>
-          <a:r>
-            <a:rPr lang="es-CO" sz="1500" kern="1200" dirty="0"/>
-            <a:t>Silver/</a:t>
-          </a:r>
-          <a:r>
-            <a:rPr lang="es-CO" sz="1500" kern="1200" dirty="0" err="1"/>
-            <a:t>Bronze</a:t>
-          </a:r>
-          <a:r>
-            <a:rPr lang="es-CO" sz="1500" kern="1200" dirty="0"/>
-            <a:t> estables</a:t>
+            <a:t>JOIN puede “explotar”</a:t>
           </a:r>
         </a:p>
       </dsp:txBody>
       <dsp:txXfrm>
-        <a:off x="3862698" y="829551"/>
-        <a:ext cx="2868289" cy="1203663"/>
+        <a:off x="3375188" y="829551"/>
+        <a:ext cx="2455555" cy="1203663"/>
       </dsp:txXfrm>
     </dsp:sp>
-    <dsp:sp modelId="{2664027A-B5AC-41CA-A071-5DF0CF1E8120}">
+    <dsp:sp modelId="{8ED051A1-811D-4C38-B101-1F9FB6E68C2F}">
       <dsp:nvSpPr>
         <dsp:cNvPr id="0" name=""/>
         <dsp:cNvSpPr/>
       </dsp:nvSpPr>
       <dsp:spPr>
         <a:xfrm>
-          <a:off x="3862698" y="406643"/>
-          <a:ext cx="2868289" cy="422908"/>
+          <a:off x="3375188" y="406643"/>
+          <a:ext cx="2455555" cy="422908"/>
         </a:xfrm>
         <a:prstGeom prst="rect">
           <a:avLst/>
@@ -3550,24 +3700,25 @@
             <a:defRPr b="1"/>
           </a:pPr>
           <a:r>
-            <a:rPr lang="es-CO" sz="2000" kern="1200" dirty="0"/>
+            <a:rPr lang="es-CO" sz="2000" kern="1200"/>
             <a:t>W03</a:t>
           </a:r>
+          <a:endParaRPr lang="es-CO" sz="2000" kern="1200" dirty="0"/>
         </a:p>
       </dsp:txBody>
       <dsp:txXfrm>
-        <a:off x="3862698" y="406643"/>
-        <a:ext cx="2868289" cy="422908"/>
+        <a:off x="3375188" y="406643"/>
+        <a:ext cx="2455555" cy="422908"/>
       </dsp:txXfrm>
     </dsp:sp>
-    <dsp:sp modelId="{6F004247-9FD8-4E6D-9363-DE121E4356A0}">
+    <dsp:sp modelId="{39358395-8FDB-4859-B0D5-418F40A118A6}">
       <dsp:nvSpPr>
         <dsp:cNvPr id="0" name=""/>
         <dsp:cNvSpPr/>
       </dsp:nvSpPr>
       <dsp:spPr>
         <a:xfrm>
-          <a:off x="3651244" y="406643"/>
+          <a:off x="3163734" y="406643"/>
           <a:ext cx="0" cy="1626572"/>
         </a:xfrm>
         <a:prstGeom prst="line">
@@ -3601,14 +3752,14 @@
         <a:fontRef idx="minor"/>
       </dsp:style>
     </dsp:sp>
-    <dsp:sp modelId="{682EA88A-A4E4-4AA7-9FB1-B83F193F2C39}">
+    <dsp:sp modelId="{AF74090F-5DD0-421A-8442-5D7C388EC70E}">
       <dsp:nvSpPr>
         <dsp:cNvPr id="0" name=""/>
         <dsp:cNvSpPr/>
       </dsp:nvSpPr>
       <dsp:spPr>
         <a:xfrm>
-          <a:off x="3601619" y="1984580"/>
+          <a:off x="3115099" y="1984580"/>
           <a:ext cx="97269" cy="97269"/>
         </a:xfrm>
         <a:prstGeom prst="ellipse">
@@ -3651,15 +3802,15 @@
         </a:fontRef>
       </dsp:style>
     </dsp:sp>
-    <dsp:sp modelId="{229A8B9E-D26E-4B8B-B637-778F404FB5B5}">
+    <dsp:sp modelId="{00D2B9ED-BE51-47B3-B26C-BA45F9641DBB}">
       <dsp:nvSpPr>
         <dsp:cNvPr id="0" name=""/>
         <dsp:cNvSpPr/>
       </dsp:nvSpPr>
       <dsp:spPr>
         <a:xfrm>
-          <a:off x="5582453" y="3009158"/>
-          <a:ext cx="2868289" cy="650628"/>
+          <a:off x="4847478" y="3009158"/>
+          <a:ext cx="2455555" cy="650628"/>
         </a:xfrm>
         <a:prstGeom prst="rect">
           <a:avLst/>
@@ -3701,25 +3852,55 @@
             <a:buNone/>
           </a:pPr>
           <a:r>
+            <a:rPr lang="es-CO" sz="1500" kern="1200" dirty="0" err="1"/>
+            <a:t>checks</a:t>
+          </a:r>
+          <a:r>
             <a:rPr lang="es-CO" sz="1500" kern="1200" dirty="0"/>
-            <a:t>performance + EXPLAIN</a:t>
+            <a:t> + contrato</a:t>
+          </a:r>
+        </a:p>
+        <a:p>
+          <a:pPr marL="0" lvl="0" indent="0" algn="l" defTabSz="666750">
+            <a:lnSpc>
+              <a:spcPct val="90000"/>
+            </a:lnSpc>
+            <a:spcBef>
+              <a:spcPct val="0"/>
+            </a:spcBef>
+            <a:spcAft>
+              <a:spcPct val="35000"/>
+            </a:spcAft>
+            <a:buNone/>
+          </a:pPr>
+          <a:r>
+            <a:rPr lang="es-CO" sz="1500" kern="1200" dirty="0"/>
+            <a:t>Silver/</a:t>
+          </a:r>
+          <a:r>
+            <a:rPr lang="es-CO" sz="1500" kern="1200" dirty="0" err="1"/>
+            <a:t>Bronze</a:t>
+          </a:r>
+          <a:r>
+            <a:rPr lang="es-CO" sz="1500" kern="1200" dirty="0"/>
+            <a:t> estables</a:t>
           </a:r>
         </a:p>
       </dsp:txBody>
       <dsp:txXfrm>
-        <a:off x="5582453" y="3009158"/>
-        <a:ext cx="2868289" cy="650628"/>
+        <a:off x="4847478" y="3009158"/>
+        <a:ext cx="2455555" cy="650628"/>
       </dsp:txXfrm>
     </dsp:sp>
-    <dsp:sp modelId="{EE41F65A-AA70-4EE3-81F3-A539EF20984B}">
+    <dsp:sp modelId="{2664027A-B5AC-41CA-A071-5DF0CF1E8120}">
       <dsp:nvSpPr>
         <dsp:cNvPr id="0" name=""/>
         <dsp:cNvSpPr/>
       </dsp:nvSpPr>
       <dsp:spPr>
         <a:xfrm>
-          <a:off x="5582453" y="2602515"/>
-          <a:ext cx="2868289" cy="406643"/>
+          <a:off x="4847478" y="2602515"/>
+          <a:ext cx="2455555" cy="406643"/>
         </a:xfrm>
         <a:prstGeom prst="rect">
           <a:avLst/>
@@ -3788,8 +3969,240 @@
         </a:p>
       </dsp:txBody>
       <dsp:txXfrm>
-        <a:off x="5582453" y="2602515"/>
-        <a:ext cx="2868289" cy="406643"/>
+        <a:off x="4847478" y="2602515"/>
+        <a:ext cx="2455555" cy="406643"/>
+      </dsp:txXfrm>
+    </dsp:sp>
+    <dsp:sp modelId="{6F004247-9FD8-4E6D-9363-DE121E4356A0}">
+      <dsp:nvSpPr>
+        <dsp:cNvPr id="0" name=""/>
+        <dsp:cNvSpPr/>
+      </dsp:nvSpPr>
+      <dsp:spPr>
+        <a:xfrm>
+          <a:off x="4636023" y="2033215"/>
+          <a:ext cx="0" cy="1626572"/>
+        </a:xfrm>
+        <a:prstGeom prst="line">
+          <a:avLst/>
+        </a:prstGeom>
+        <a:noFill/>
+        <a:ln w="12700" cap="flat" cmpd="sng" algn="ctr">
+          <a:solidFill>
+            <a:schemeClr val="dk2">
+              <a:hueOff val="0"/>
+              <a:satOff val="0"/>
+              <a:lumOff val="0"/>
+              <a:alphaOff val="0"/>
+            </a:schemeClr>
+          </a:solidFill>
+          <a:prstDash val="solid"/>
+          <a:miter lim="800000"/>
+        </a:ln>
+        <a:effectLst/>
+      </dsp:spPr>
+      <dsp:style>
+        <a:lnRef idx="1">
+          <a:scrgbClr r="0" g="0" b="0"/>
+        </a:lnRef>
+        <a:fillRef idx="0">
+          <a:scrgbClr r="0" g="0" b="0"/>
+        </a:fillRef>
+        <a:effectRef idx="0">
+          <a:scrgbClr r="0" g="0" b="0"/>
+        </a:effectRef>
+        <a:fontRef idx="minor"/>
+      </dsp:style>
+    </dsp:sp>
+    <dsp:sp modelId="{682EA88A-A4E4-4AA7-9FB1-B83F193F2C39}">
+      <dsp:nvSpPr>
+        <dsp:cNvPr id="0" name=""/>
+        <dsp:cNvSpPr/>
+      </dsp:nvSpPr>
+      <dsp:spPr>
+        <a:xfrm>
+          <a:off x="4587389" y="1984580"/>
+          <a:ext cx="97269" cy="97269"/>
+        </a:xfrm>
+        <a:prstGeom prst="ellipse">
+          <a:avLst/>
+        </a:prstGeom>
+        <a:solidFill>
+          <a:schemeClr val="accent1">
+            <a:hueOff val="0"/>
+            <a:satOff val="0"/>
+            <a:lumOff val="0"/>
+            <a:alphaOff val="0"/>
+          </a:schemeClr>
+        </a:solidFill>
+        <a:ln w="6350" cap="flat" cmpd="sng" algn="ctr">
+          <a:solidFill>
+            <a:schemeClr val="lt1">
+              <a:hueOff val="0"/>
+              <a:satOff val="0"/>
+              <a:lumOff val="0"/>
+              <a:alphaOff val="0"/>
+            </a:schemeClr>
+          </a:solidFill>
+          <a:prstDash val="solid"/>
+          <a:miter lim="800000"/>
+        </a:ln>
+        <a:effectLst/>
+      </dsp:spPr>
+      <dsp:style>
+        <a:lnRef idx="2">
+          <a:scrgbClr r="0" g="0" b="0"/>
+        </a:lnRef>
+        <a:fillRef idx="1">
+          <a:scrgbClr r="0" g="0" b="0"/>
+        </a:fillRef>
+        <a:effectRef idx="0">
+          <a:scrgbClr r="0" g="0" b="0"/>
+        </a:effectRef>
+        <a:fontRef idx="minor">
+          <a:schemeClr val="lt1"/>
+        </a:fontRef>
+      </dsp:style>
+    </dsp:sp>
+    <dsp:sp modelId="{229A8B9E-D26E-4B8B-B637-778F404FB5B5}">
+      <dsp:nvSpPr>
+        <dsp:cNvPr id="0" name=""/>
+        <dsp:cNvSpPr/>
+      </dsp:nvSpPr>
+      <dsp:spPr>
+        <a:xfrm>
+          <a:off x="6319767" y="829551"/>
+          <a:ext cx="2455555" cy="1203663"/>
+        </a:xfrm>
+        <a:prstGeom prst="rect">
+          <a:avLst/>
+        </a:prstGeom>
+        <a:noFill/>
+        <a:ln>
+          <a:noFill/>
+        </a:ln>
+        <a:effectLst/>
+      </dsp:spPr>
+      <dsp:style>
+        <a:lnRef idx="0">
+          <a:scrgbClr r="0" g="0" b="0"/>
+        </a:lnRef>
+        <a:fillRef idx="0">
+          <a:scrgbClr r="0" g="0" b="0"/>
+        </a:fillRef>
+        <a:effectRef idx="0">
+          <a:scrgbClr r="0" g="0" b="0"/>
+        </a:effectRef>
+        <a:fontRef idx="minor"/>
+      </dsp:style>
+      <dsp:txBody>
+        <a:bodyPr spcFirstLastPara="0" vert="horz" wrap="square" lIns="0" tIns="95250" rIns="95250" bIns="142875" numCol="1" spcCol="1270" anchor="t" anchorCtr="0">
+          <a:noAutofit/>
+        </a:bodyPr>
+        <a:lstStyle/>
+        <a:p>
+          <a:pPr marL="0" lvl="0" indent="0" algn="l" defTabSz="666750">
+            <a:lnSpc>
+              <a:spcPct val="90000"/>
+            </a:lnSpc>
+            <a:spcBef>
+              <a:spcPct val="0"/>
+            </a:spcBef>
+            <a:spcAft>
+              <a:spcPct val="35000"/>
+            </a:spcAft>
+            <a:buNone/>
+          </a:pPr>
+          <a:r>
+            <a:rPr lang="es-CO" sz="1500" kern="1200" dirty="0"/>
+            <a:t>performance + EXPLAIN</a:t>
+          </a:r>
+        </a:p>
+      </dsp:txBody>
+      <dsp:txXfrm>
+        <a:off x="6319767" y="829551"/>
+        <a:ext cx="2455555" cy="1203663"/>
+      </dsp:txXfrm>
+    </dsp:sp>
+    <dsp:sp modelId="{EE41F65A-AA70-4EE3-81F3-A539EF20984B}">
+      <dsp:nvSpPr>
+        <dsp:cNvPr id="0" name=""/>
+        <dsp:cNvSpPr/>
+      </dsp:nvSpPr>
+      <dsp:spPr>
+        <a:xfrm>
+          <a:off x="6319767" y="406643"/>
+          <a:ext cx="2455555" cy="422908"/>
+        </a:xfrm>
+        <a:prstGeom prst="rect">
+          <a:avLst/>
+        </a:prstGeom>
+        <a:solidFill>
+          <a:schemeClr val="accent1">
+            <a:alpha val="0"/>
+            <a:hueOff val="0"/>
+            <a:satOff val="0"/>
+            <a:lumOff val="0"/>
+            <a:alphaOff val="0"/>
+          </a:schemeClr>
+        </a:solidFill>
+        <a:ln w="19050" cap="flat" cmpd="sng" algn="ctr">
+          <a:solidFill>
+            <a:schemeClr val="accent1">
+              <a:alpha val="0"/>
+              <a:hueOff val="0"/>
+              <a:satOff val="0"/>
+              <a:lumOff val="0"/>
+              <a:alphaOff val="0"/>
+            </a:schemeClr>
+          </a:solidFill>
+          <a:prstDash val="solid"/>
+          <a:miter lim="800000"/>
+        </a:ln>
+        <a:effectLst/>
+      </dsp:spPr>
+      <dsp:style>
+        <a:lnRef idx="2">
+          <a:scrgbClr r="0" g="0" b="0"/>
+        </a:lnRef>
+        <a:fillRef idx="1">
+          <a:scrgbClr r="0" g="0" b="0"/>
+        </a:fillRef>
+        <a:effectRef idx="0">
+          <a:scrgbClr r="0" g="0" b="0"/>
+        </a:effectRef>
+        <a:fontRef idx="minor">
+          <a:schemeClr val="lt1"/>
+        </a:fontRef>
+      </dsp:style>
+      <dsp:txBody>
+        <a:bodyPr spcFirstLastPara="0" vert="horz" wrap="square" lIns="0" tIns="0" rIns="127000" bIns="0" numCol="1" spcCol="1270" anchor="ctr" anchorCtr="0">
+          <a:noAutofit/>
+        </a:bodyPr>
+        <a:lstStyle/>
+        <a:p>
+          <a:pPr marL="0" lvl="0" indent="0" algn="l" defTabSz="889000">
+            <a:lnSpc>
+              <a:spcPct val="90000"/>
+            </a:lnSpc>
+            <a:spcBef>
+              <a:spcPct val="0"/>
+            </a:spcBef>
+            <a:spcAft>
+              <a:spcPct val="35000"/>
+            </a:spcAft>
+            <a:buNone/>
+            <a:defRPr b="1"/>
+          </a:pPr>
+          <a:r>
+            <a:rPr lang="es-CO" sz="2000" kern="1200" dirty="0"/>
+            <a:t>W05</a:t>
+          </a:r>
+        </a:p>
+      </dsp:txBody>
+      <dsp:txXfrm>
+        <a:off x="6319767" y="406643"/>
+        <a:ext cx="2455555" cy="422908"/>
       </dsp:txXfrm>
     </dsp:sp>
     <dsp:sp modelId="{E28909AF-007C-49D7-8958-97FF1699473D}">
@@ -3799,7 +4212,7 @@
       </dsp:nvSpPr>
       <dsp:spPr>
         <a:xfrm>
-          <a:off x="5370998" y="2033215"/>
+          <a:off x="6108313" y="406643"/>
           <a:ext cx="0" cy="1626572"/>
         </a:xfrm>
         <a:prstGeom prst="line">
@@ -3840,7 +4253,7 @@
       </dsp:nvSpPr>
       <dsp:spPr>
         <a:xfrm>
-          <a:off x="5321373" y="1984580"/>
+          <a:off x="6059678" y="1984580"/>
           <a:ext cx="97269" cy="97269"/>
         </a:xfrm>
         <a:prstGeom prst="ellipse">
@@ -3890,8 +4303,8 @@
       </dsp:nvSpPr>
       <dsp:spPr>
         <a:xfrm>
-          <a:off x="7302207" y="829551"/>
-          <a:ext cx="2868289" cy="1203663"/>
+          <a:off x="7792057" y="3009158"/>
+          <a:ext cx="2455555" cy="650628"/>
         </a:xfrm>
         <a:prstGeom prst="rect">
           <a:avLst/>
@@ -3915,7 +4328,7 @@
         <a:fontRef idx="minor"/>
       </dsp:style>
       <dsp:txBody>
-        <a:bodyPr spcFirstLastPara="0" vert="horz" wrap="square" lIns="0" tIns="95250" rIns="95250" bIns="142875" numCol="1" spcCol="1270" anchor="t" anchorCtr="0">
+        <a:bodyPr spcFirstLastPara="0" vert="horz" wrap="square" lIns="0" tIns="142875" rIns="142875" bIns="95250" numCol="1" spcCol="1270" anchor="t" anchorCtr="0">
           <a:noAutofit/>
         </a:bodyPr>
         <a:lstStyle/>
@@ -3940,8 +4353,8 @@
         </a:p>
       </dsp:txBody>
       <dsp:txXfrm>
-        <a:off x="7302207" y="829551"/>
-        <a:ext cx="2868289" cy="1203663"/>
+        <a:off x="7792057" y="3009158"/>
+        <a:ext cx="2455555" cy="650628"/>
       </dsp:txXfrm>
     </dsp:sp>
     <dsp:sp modelId="{F7F215AA-1548-4946-9818-24CE434B0257}">
@@ -3951,8 +4364,8 @@
       </dsp:nvSpPr>
       <dsp:spPr>
         <a:xfrm>
-          <a:off x="7302207" y="406643"/>
-          <a:ext cx="2868289" cy="422908"/>
+          <a:off x="7792057" y="2602515"/>
+          <a:ext cx="2455555" cy="406643"/>
         </a:xfrm>
         <a:prstGeom prst="rect">
           <a:avLst/>
@@ -4021,8 +4434,8 @@
         </a:p>
       </dsp:txBody>
       <dsp:txXfrm>
-        <a:off x="7302207" y="406643"/>
-        <a:ext cx="2868289" cy="422908"/>
+        <a:off x="7792057" y="2602515"/>
+        <a:ext cx="2455555" cy="406643"/>
       </dsp:txXfrm>
     </dsp:sp>
     <dsp:sp modelId="{A657FCB3-50B0-4F61-A00C-56D9B387AFBF}">
@@ -4032,7 +4445,7 @@
       </dsp:nvSpPr>
       <dsp:spPr>
         <a:xfrm>
-          <a:off x="7090752" y="406643"/>
+          <a:off x="7580602" y="2033215"/>
           <a:ext cx="0" cy="1626572"/>
         </a:xfrm>
         <a:prstGeom prst="line">
@@ -4073,7 +4486,7 @@
       </dsp:nvSpPr>
       <dsp:spPr>
         <a:xfrm>
-          <a:off x="7041127" y="1984580"/>
+          <a:off x="7531968" y="1984580"/>
           <a:ext cx="97269" cy="97269"/>
         </a:xfrm>
         <a:prstGeom prst="ellipse">
@@ -7882,7 +8295,7 @@
           <a:p>
             <a:fld id="{DD9C32C8-E2D6-4D2E-89CE-FD02DE040E41}" type="datetimeFigureOut">
               <a:rPr lang="es-CO" smtClean="0"/>
-              <a:t>15/02/2026</a:t>
+              <a:t>1/03/2026</a:t>
             </a:fld>
             <a:endParaRPr lang="es-CO"/>
           </a:p>
@@ -9174,7 +9587,7 @@
           <a:p>
             <a:fld id="{CB303C1B-2226-4B35-84FD-6BE56F4CF1DA}" type="datetimeFigureOut">
               <a:rPr lang="es-CO" smtClean="0"/>
-              <a:t>15/02/2026</a:t>
+              <a:t>1/03/2026</a:t>
             </a:fld>
             <a:endParaRPr lang="es-CO"/>
           </a:p>
@@ -9374,7 +9787,7 @@
           <a:p>
             <a:fld id="{CB303C1B-2226-4B35-84FD-6BE56F4CF1DA}" type="datetimeFigureOut">
               <a:rPr lang="es-CO" smtClean="0"/>
-              <a:t>15/02/2026</a:t>
+              <a:t>1/03/2026</a:t>
             </a:fld>
             <a:endParaRPr lang="es-CO"/>
           </a:p>
@@ -9584,7 +9997,7 @@
           <a:p>
             <a:fld id="{CB303C1B-2226-4B35-84FD-6BE56F4CF1DA}" type="datetimeFigureOut">
               <a:rPr lang="es-CO" smtClean="0"/>
-              <a:t>15/02/2026</a:t>
+              <a:t>1/03/2026</a:t>
             </a:fld>
             <a:endParaRPr lang="es-CO"/>
           </a:p>
@@ -9784,7 +10197,7 @@
           <a:p>
             <a:fld id="{CB303C1B-2226-4B35-84FD-6BE56F4CF1DA}" type="datetimeFigureOut">
               <a:rPr lang="es-CO" smtClean="0"/>
-              <a:t>15/02/2026</a:t>
+              <a:t>1/03/2026</a:t>
             </a:fld>
             <a:endParaRPr lang="es-CO"/>
           </a:p>
@@ -10060,7 +10473,7 @@
           <a:p>
             <a:fld id="{CB303C1B-2226-4B35-84FD-6BE56F4CF1DA}" type="datetimeFigureOut">
               <a:rPr lang="es-CO" smtClean="0"/>
-              <a:t>15/02/2026</a:t>
+              <a:t>1/03/2026</a:t>
             </a:fld>
             <a:endParaRPr lang="es-CO"/>
           </a:p>
@@ -10328,7 +10741,7 @@
           <a:p>
             <a:fld id="{CB303C1B-2226-4B35-84FD-6BE56F4CF1DA}" type="datetimeFigureOut">
               <a:rPr lang="es-CO" smtClean="0"/>
-              <a:t>15/02/2026</a:t>
+              <a:t>1/03/2026</a:t>
             </a:fld>
             <a:endParaRPr lang="es-CO"/>
           </a:p>
@@ -10743,7 +11156,7 @@
           <a:p>
             <a:fld id="{CB303C1B-2226-4B35-84FD-6BE56F4CF1DA}" type="datetimeFigureOut">
               <a:rPr lang="es-CO" smtClean="0"/>
-              <a:t>15/02/2026</a:t>
+              <a:t>1/03/2026</a:t>
             </a:fld>
             <a:endParaRPr lang="es-CO"/>
           </a:p>
@@ -10885,7 +11298,7 @@
           <a:p>
             <a:fld id="{CB303C1B-2226-4B35-84FD-6BE56F4CF1DA}" type="datetimeFigureOut">
               <a:rPr lang="es-CO" smtClean="0"/>
-              <a:t>15/02/2026</a:t>
+              <a:t>1/03/2026</a:t>
             </a:fld>
             <a:endParaRPr lang="es-CO"/>
           </a:p>
@@ -10998,7 +11411,7 @@
           <a:p>
             <a:fld id="{CB303C1B-2226-4B35-84FD-6BE56F4CF1DA}" type="datetimeFigureOut">
               <a:rPr lang="es-CO" smtClean="0"/>
-              <a:t>15/02/2026</a:t>
+              <a:t>1/03/2026</a:t>
             </a:fld>
             <a:endParaRPr lang="es-CO"/>
           </a:p>
@@ -11311,7 +11724,7 @@
           <a:p>
             <a:fld id="{CB303C1B-2226-4B35-84FD-6BE56F4CF1DA}" type="datetimeFigureOut">
               <a:rPr lang="es-CO" smtClean="0"/>
-              <a:t>15/02/2026</a:t>
+              <a:t>1/03/2026</a:t>
             </a:fld>
             <a:endParaRPr lang="es-CO"/>
           </a:p>
@@ -11600,7 +12013,7 @@
           <a:p>
             <a:fld id="{CB303C1B-2226-4B35-84FD-6BE56F4CF1DA}" type="datetimeFigureOut">
               <a:rPr lang="es-CO" smtClean="0"/>
-              <a:t>15/02/2026</a:t>
+              <a:t>1/03/2026</a:t>
             </a:fld>
             <a:endParaRPr lang="es-CO"/>
           </a:p>
@@ -11843,7 +12256,7 @@
           <a:p>
             <a:fld id="{CB303C1B-2226-4B35-84FD-6BE56F4CF1DA}" type="datetimeFigureOut">
               <a:rPr lang="es-CO" smtClean="0"/>
-              <a:t>15/02/2026</a:t>
+              <a:t>1/03/2026</a:t>
             </a:fld>
             <a:endParaRPr lang="es-CO"/>
           </a:p>
@@ -21063,7 +21476,7 @@
             <p:ph idx="1"/>
             <p:extLst>
               <p:ext uri="{D42A27DB-BD31-4B8C-83A1-F6EECF244321}">
-                <p14:modId xmlns:p14="http://schemas.microsoft.com/office/powerpoint/2010/main" val="3171206448"/>
+                <p14:modId xmlns:p14="http://schemas.microsoft.com/office/powerpoint/2010/main" val="646918917"/>
               </p:ext>
               <p:ext uri="{E7BDC344-281C-4309-B0C6-D0EE65EED2A8}">
                 <p202:designPr xmlns:p202="http://schemas.microsoft.com/office/powerpoint/2020/02/main">
